--- a/slides/week07/ch12_metrics.pptx
+++ b/slides/week07/ch12_metrics.pptx
@@ -872,7 +872,7 @@
           <a:lstStyle/>
           <a:p>
             <a:r>
-              <a:t>중간시험은 10-27이고 범위는 0장부터 8장과 12장이다. 9주차 시험 전까지 교재의 연습문제를 다시 확인하도록 안내한다.</a:t>
+              <a:t>HW3 명세는 assignments/hw3.md에 있다. 휴강 주간에 팀별로 현장조사를 하고 마감은 10-28이다. 중간시험은 10-27이고 범위는 0장부터 8장과 12장이다. 9주차 시험 전까지 교재의 연습문제를 다시 확인하도록 안내한다.</a:t>
             </a:r>
           </a:p>
         </p:txBody>
@@ -7595,7 +7595,7 @@
           <a:p>
             <a:pPr/>
             <a:r>
-              <a:t>다음 주: 8주차 휴강, HW3 무당이 GTFS 작성과 승하차 조사</a:t>
+              <a:t>다음 주: 8주차 휴강, HW3 무당이 GTFS 작성과 승하차 조사 (팀)</a:t>
             </a:r>
           </a:p>
         </p:txBody>

--- a/slides/week07/ch12_metrics.pptx
+++ b/slides/week07/ch12_metrics.pptx
@@ -27,6 +27,7 @@
     <p:sldId id="275" r:id="rId26"/>
     <p:sldId id="276" r:id="rId27"/>
     <p:sldId id="277" r:id="rId28"/>
+    <p:sldId id="278" r:id="rId29"/>
   </p:sldIdLst>
   <p:notesMasterIdLst>
     <p:notesMasterId r:id="rId15"/>
@@ -592,7 +593,7 @@
           <a:lstStyle/>
           <a:p>
             <a:r>
-              <a:t>0장에서 확인한 근무 시간 종료 효과가 여기서 다시 나온다. 지표 하나로 요약하기 전에 시계열을 먼저 확인하는 순서를 지킨다.</a:t>
+              <a:t>남의 결과와 숫자가 다르면 먼저 같은 것을 세고 있는지 확인한다. 정의나 표본이 다른 경우가 알고리즘이 틀린 경우보다 훨씬 많다.</a:t>
             </a:r>
           </a:p>
         </p:txBody>
@@ -662,7 +663,7 @@
           <a:lstStyle/>
           <a:p>
             <a:r>
-              <a:t>숫자만으로는 어디가 문제인지 알 수 없다. 11장 연습 11.3이 이 재배치 문제이고, 기말 프로젝트의 노선 변경 시나리오와도 연결된다.</a:t>
+              <a:t>0장에서 확인한 근무 시간 종료 효과가 여기서 다시 나온다. 지표 하나로 요약하기 전에 시계열을 먼저 확인하는 순서를 지킨다.</a:t>
             </a:r>
           </a:p>
         </p:txBody>
@@ -732,7 +733,7 @@
           <a:lstStyle/>
           <a:p>
             <a:r>
-              <a:t>마지막 항목을 빼지 않는다. 우리 시뮬레이터는 차량 재배치가 없고 소요시간을 근사했으며 신호 대기를 반영하지 않았다. 이것을 적지 않은 보고서는 결과를 실제보다 확실한 것처럼 보이게 한다.</a:t>
+              <a:t>숫자만으로는 어디가 문제인지 알 수 없다. 11장 연습 11.3이 이 재배치 문제이고, 기말 프로젝트의 노선 변경 시나리오와도 연결된다.</a:t>
             </a:r>
           </a:p>
         </p:txBody>
@@ -802,7 +803,7 @@
           <a:lstStyle/>
           <a:p>
             <a:r>
-              <a:t>파레토 프론트 위에서는 사람이 정한다는 점을 다시 언급한다. 이것으로 중간시험 범위인 0장부터 8장과 12장이 끝난다.</a:t>
+              <a:t>마지막 항목을 빼지 않는다. 우리 시뮬레이터는 차량 재배치가 없고 소요시간을 근사했으며 신호 대기를 반영하지 않았다. 이것을 적지 않은 보고서는 결과를 실제보다 확실한 것처럼 보이게 한다.</a:t>
             </a:r>
           </a:p>
         </p:txBody>
@@ -872,6 +873,76 @@
           <a:lstStyle/>
           <a:p>
             <a:r>
+              <a:t>파레토 프론트 위에서는 사람이 정한다는 점을 다시 언급한다. 이것으로 중간시험 범위인 0장부터 8장과 12장이 끝난다.</a:t>
+            </a:r>
+          </a:p>
+        </p:txBody>
+      </p:sp>
+      <p:sp>
+        <p:nvSpPr>
+          <p:cNvPr id="4" name="Slide Number Placeholder 3"/>
+          <p:cNvSpPr>
+            <a:spLocks noGrp="1"/>
+          </p:cNvSpPr>
+          <p:nvPr>
+            <p:ph type="sldNum" idx="5" sz="quarter"/>
+          </p:nvPr>
+        </p:nvSpPr>
+        <p:spPr/>
+      </p:sp>
+    </p:spTree>
+  </p:cSld>
+  <p:clrMapOvr>
+    <a:masterClrMapping/>
+  </p:clrMapOvr>
+</p:notes>
+</file>
+
+<file path=ppt/notesSlides/notesSlide15.xml><?xml version="1.0" encoding="utf-8"?>
+<p:notes xmlns:a="http://schemas.openxmlformats.org/drawingml/2006/main" xmlns:p="http://schemas.openxmlformats.org/presentationml/2006/main" xmlns:r="http://schemas.openxmlformats.org/officeDocument/2006/relationships">
+  <p:cSld>
+    <p:spTree>
+      <p:nvGrpSpPr>
+        <p:cNvPr id="1" name=""/>
+        <p:cNvGrpSpPr/>
+        <p:nvPr/>
+      </p:nvGrpSpPr>
+      <p:grpSpPr>
+        <a:xfrm>
+          <a:off x="0" y="0"/>
+          <a:ext cx="0" cy="0"/>
+          <a:chOff x="0" y="0"/>
+          <a:chExt cx="0" cy="0"/>
+        </a:xfrm>
+      </p:grpSpPr>
+      <p:sp>
+        <p:nvSpPr>
+          <p:cNvPr id="2" name="Slide Image Placeholder 1"/>
+          <p:cNvSpPr>
+            <a:spLocks noGrp="1"/>
+          </p:cNvSpPr>
+          <p:nvPr>
+            <p:ph type="sldImg" idx="2"/>
+          </p:nvPr>
+        </p:nvSpPr>
+        <p:spPr/>
+      </p:sp>
+      <p:sp>
+        <p:nvSpPr>
+          <p:cNvPr id="3" name="Notes Placeholder 2"/>
+          <p:cNvSpPr>
+            <a:spLocks noGrp="1"/>
+          </p:cNvSpPr>
+          <p:nvPr>
+            <p:ph type="body" idx="3" sz="quarter"/>
+          </p:nvPr>
+        </p:nvSpPr>
+        <p:spPr/>
+        <p:txBody>
+          <a:bodyPr/>
+          <a:lstStyle/>
+          <a:p>
+            <a:r>
               <a:t>HW3 명세는 assignments/hw3.md에 있다. 휴강 주간에 팀별로 현장조사를 하고 마감은 10-28이다. 중간시험은 10-27이고 범위는 0장부터 8장과 12장이다. 9주차 시험 전까지 교재의 연습문제를 다시 확인하도록 안내한다.</a:t>
             </a:r>
           </a:p>
@@ -1082,7 +1153,7 @@
           <a:lstStyle/>
           <a:p>
             <a:r>
-              <a:t>1장에서 확인한 세 관점이 여기서 지표로 구체화된다. 마지막 값이 도시가 관심을 두는 부분이다.</a:t>
+              <a:t>슬라이드는 개요만 다룬다. 세부 내용과 코드는 교재 원고와 실습 노트북에서 확인한다. 교재 저장소는 비공개이므로 초대받은 계정으로 로그인한 상태여야 주소가 열린다.</a:t>
             </a:r>
           </a:p>
         </p:txBody>
@@ -1152,7 +1223,7 @@
           <a:lstStyle/>
           <a:p>
             <a:r>
-              <a:t>이 함정이 프로젝트 보고서에서 가장 자주 나온다. 차량을 줄였는데 대기시간이 그대로였다는 결론을 보면 먼저 서비스율을 확인하게 한다.</a:t>
+              <a:t>1장에서 확인한 세 관점이 여기서 지표로 구체화된다. 마지막 값이 도시가 관심을 두는 부분이다.</a:t>
             </a:r>
           </a:p>
         </p:txBody>
@@ -1222,7 +1293,7 @@
           <a:lstStyle/>
           <a:p>
             <a:r>
-              <a:t>둘 다 맞는 방법이고 답하려는 질문이 다르다. 하나만 적으면 읽는 사람이 잘못 이해한다. 연습 12.2에서 벌점 값을 바꿔 순위가 뒤집히는 지점을 찾는다.</a:t>
+              <a:t>이 함정이 프로젝트 보고서에서 가장 자주 나온다. 차량을 줄였는데 대기시간이 그대로였다는 결론을 보면 먼저 서비스율을 확인하게 한다.</a:t>
             </a:r>
           </a:p>
         </p:txBody>
@@ -1292,7 +1363,7 @@
           <a:lstStyle/>
           <a:p>
             <a:r>
-              <a:t>평균이 숨기는 두 가지를 한 장에서 확인할 수 있다. 7장에서 통행시간 분포를 확인한 것과 같은 접근이다.</a:t>
+              <a:t>둘 다 맞는 방법이고 답하려는 질문이 다르다. 하나만 적으면 읽는 사람이 잘못 이해한다. 연습 12.2에서 벌점 값을 바꿔 순위가 뒤집히는 지점을 찾는다.</a:t>
             </a:r>
           </a:p>
         </p:txBody>
@@ -1362,7 +1433,7 @@
           <a:lstStyle/>
           <a:p>
             <a:r>
-              <a:t>프론트 위에서는 데이터가 답을 정해 주지 않는다. 사람이 정한다. 기말 프로젝트에서 시나리오를 고를 때 이 그림을 근거로 쓴다.</a:t>
+              <a:t>평균이 숨기는 두 가지를 한 장에서 확인할 수 있다. 7장에서 통행시간 분포를 확인한 것과 같은 접근이다.</a:t>
             </a:r>
           </a:p>
         </p:txBody>
@@ -1432,7 +1503,7 @@
           <a:lstStyle/>
           <a:p>
             <a:r>
-              <a:t>남의 결과와 숫자가 다르면 먼저 같은 것을 세고 있는지 확인한다. 정의나 표본이 다른 경우가 알고리즘이 틀린 경우보다 훨씬 많다.</a:t>
+              <a:t>프론트 위에서는 데이터가 답을 정해 주지 않는다. 사람이 정한다. 기말 프로젝트에서 시나리오를 고를 때 이 그림을 근거로 쓴다.</a:t>
             </a:r>
           </a:p>
         </p:txBody>
@@ -5081,7 +5152,7 @@
           <a:lstStyle/>
           <a:p>
             <a:r>
-              <a:t>3.2 포기 승객을 세는 방법</a:t>
+              <a:t>3.1 대기시간이 줄지 않는 이유</a:t>
             </a:r>
           </a:p>
         </p:txBody>
@@ -5124,47 +5195,505 @@
           <a:p>
             <a:pPr/>
             <a:r>
-              <a:t>방법 1: 배차된 승객만 집계</a:t>
+              <a:t>대기시간은 배차에 성공한 승객만 계산 대상</a:t>
             </a:r>
           </a:p>
           <a:p>
             <a:pPr/>
             <a:r>
-              <a:t>방법 2: 포기 승객에게 벌점 시간 부여 — 예를 들어 30분</a:t>
-            </a:r>
-          </a:p>
-          <a:p>
-            <a:pPr lvl="1"/>
-            <a:r>
-              <a:t>20대 시나리오가 21분 초과, 80대는 4.28분 — 순위 역전</a:t>
+              <a:t>차량이 적으면 가까운 승객만 배차되고 먼 승객은 포기 처리</a:t>
             </a:r>
           </a:p>
           <a:p>
             <a:pPr/>
             <a:r>
-              <a:t>선택 기준은 답하려는 질문</a:t>
-            </a:r>
-          </a:p>
-          <a:p>
-            <a:pPr lvl="1"/>
-            <a:r>
-              <a:t>택시를 탄 사람의 대기 시간 → 방법 1</a:t>
-            </a:r>
-          </a:p>
-          <a:p>
-            <a:pPr lvl="1"/>
-            <a:r>
-              <a:t>이 지역에서 택시를 부를 때의 소요 → 방법 2</a:t>
-            </a:r>
-          </a:p>
-          <a:p>
-            <a:pPr/>
-            <a:r>
-              <a:t>보고서 원칙: 서비스율과 대기시간을 항상 함께 기재</a:t>
-            </a:r>
-          </a:p>
-        </p:txBody>
-      </p:sp>
+              <a:t>남은 승객의 평균 대기가 짧게 산출 — 생존 편향</a:t>
+            </a:r>
+          </a:p>
+        </p:txBody>
+      </p:sp>
+      <p:sp>
+        <p:nvSpPr>
+          <p:cNvPr id="5" name="Text Placeholder 4"/>
+          <p:cNvSpPr>
+            <a:spLocks noGrp="1"/>
+          </p:cNvSpPr>
+          <p:nvPr>
+            <p:ph type="body" idx="103"/>
+          </p:nvPr>
+        </p:nvSpPr>
+        <p:spPr/>
+        <p:txBody>
+          <a:bodyPr/>
+          <a:lstStyle/>
+          <a:p>
+            <a:r>
+              <a:t>표 3. 차량 대수별 평균 대기시간과 서비스율</a:t>
+            </a:r>
+          </a:p>
+        </p:txBody>
+      </p:sp>
+      <p:graphicFrame>
+        <p:nvGraphicFramePr>
+          <p:cNvPr id="6" name="Table Placeholder 5"/>
+          <p:cNvGraphicFramePr>
+            <a:graphicFrameLocks noGrp="1"/>
+          </p:cNvGraphicFramePr>
+          <p:nvPr>
+            <p:ph type="tbl" idx="104"/>
+          </p:nvPr>
+        </p:nvGraphicFramePr>
+        <p:xfrm>
+          <a:off x="4937760" y="1828800"/>
+          <a:ext cx="6565392" cy="2311400"/>
+        </p:xfrm>
+        <a:graphic>
+          <a:graphicData uri="http://schemas.openxmlformats.org/drawingml/2006/table">
+            <a:tbl>
+              <a:tblPr firstRow="0" bandRow="0" firstCol="0" lastRow="0" lastCol="0" bandCol="0"/>
+              <a:tblGrid>
+                <a:gridCol w="2188464"/>
+                <a:gridCol w="2188464"/>
+                <a:gridCol w="2188464"/>
+              </a:tblGrid>
+              <a:tr h="406400">
+                <a:tc>
+                  <a:txBody>
+                    <a:bodyPr/>
+                    <a:lstStyle/>
+                    <a:p>
+                      <a:r>
+                        <a:rPr sz="1300" b="0">
+                          <a:solidFill>
+                            <a:srgbClr val="FFFFFF"/>
+                          </a:solidFill>
+                          <a:latin typeface="Pretendard Medium"/>
+                        </a:rPr>
+                        <a:t>차량</a:t>
+                      </a:r>
+                    </a:p>
+                  </a:txBody>
+                  <a:tcPr marL="101600" marR="101600" marT="76200" marB="76200" anchor="ctr">
+                    <a:solidFill>
+                      <a:srgbClr val="000000"/>
+                    </a:solidFill>
+                    <a:lnL w="0">
+                      <a:noFill/>
+                    </a:lnL>
+                    <a:lnR w="0">
+                      <a:noFill/>
+                    </a:lnR>
+                    <a:lnT w="0">
+                      <a:noFill/>
+                    </a:lnT>
+                    <a:lnB w="0">
+                      <a:noFill/>
+                    </a:lnB>
+                  </a:tcPr>
+                </a:tc>
+                <a:tc>
+                  <a:txBody>
+                    <a:bodyPr/>
+                    <a:lstStyle/>
+                    <a:p>
+                      <a:r>
+                        <a:rPr sz="1300" b="0">
+                          <a:solidFill>
+                            <a:srgbClr val="FFFFFF"/>
+                          </a:solidFill>
+                          <a:latin typeface="Pretendard Medium"/>
+                        </a:rPr>
+                        <a:t>평균 대기</a:t>
+                      </a:r>
+                    </a:p>
+                  </a:txBody>
+                  <a:tcPr marL="101600" marR="101600" marT="76200" marB="76200" anchor="ctr">
+                    <a:solidFill>
+                      <a:srgbClr val="000000"/>
+                    </a:solidFill>
+                    <a:lnL w="0">
+                      <a:noFill/>
+                    </a:lnL>
+                    <a:lnR w="0">
+                      <a:noFill/>
+                    </a:lnR>
+                    <a:lnT w="0">
+                      <a:noFill/>
+                    </a:lnT>
+                    <a:lnB w="0">
+                      <a:noFill/>
+                    </a:lnB>
+                  </a:tcPr>
+                </a:tc>
+                <a:tc>
+                  <a:txBody>
+                    <a:bodyPr/>
+                    <a:lstStyle/>
+                    <a:p>
+                      <a:r>
+                        <a:rPr sz="1300" b="0">
+                          <a:solidFill>
+                            <a:srgbClr val="FFFFFF"/>
+                          </a:solidFill>
+                          <a:latin typeface="Pretendard Medium"/>
+                        </a:rPr>
+                        <a:t>서비스율</a:t>
+                      </a:r>
+                    </a:p>
+                  </a:txBody>
+                  <a:tcPr marL="101600" marR="101600" marT="76200" marB="76200" anchor="ctr">
+                    <a:solidFill>
+                      <a:srgbClr val="000000"/>
+                    </a:solidFill>
+                    <a:lnL w="0">
+                      <a:noFill/>
+                    </a:lnL>
+                    <a:lnR w="0">
+                      <a:noFill/>
+                    </a:lnR>
+                    <a:lnT w="0">
+                      <a:noFill/>
+                    </a:lnT>
+                    <a:lnB w="0">
+                      <a:noFill/>
+                    </a:lnB>
+                  </a:tcPr>
+                </a:tc>
+              </a:tr>
+              <a:tr h="635000">
+                <a:tc>
+                  <a:txBody>
+                    <a:bodyPr/>
+                    <a:lstStyle/>
+                    <a:p>
+                      <a:r>
+                        <a:rPr sz="1300" b="1">
+                          <a:solidFill>
+                            <a:srgbClr val="000000"/>
+                          </a:solidFill>
+                          <a:latin typeface="Pretendard"/>
+                        </a:rPr>
+                        <a:t>20대</a:t>
+                      </a:r>
+                    </a:p>
+                  </a:txBody>
+                  <a:tcPr marL="101600" marR="101600" marT="101600" marB="101600" anchor="ctr">
+                    <a:solidFill>
+                      <a:srgbClr val="FFFFFF"/>
+                    </a:solidFill>
+                    <a:lnL w="0">
+                      <a:noFill/>
+                    </a:lnL>
+                    <a:lnR w="0">
+                      <a:noFill/>
+                    </a:lnR>
+                    <a:lnT w="0">
+                      <a:noFill/>
+                    </a:lnT>
+                    <a:lnB w="9525">
+                      <a:solidFill>
+                        <a:srgbClr val="E2E2E2"/>
+                      </a:solidFill>
+                    </a:lnB>
+                  </a:tcPr>
+                </a:tc>
+                <a:tc>
+                  <a:txBody>
+                    <a:bodyPr/>
+                    <a:lstStyle/>
+                    <a:p>
+                      <a:r>
+                        <a:rPr sz="1300" b="0">
+                          <a:solidFill>
+                            <a:srgbClr val="5E5E5E"/>
+                          </a:solidFill>
+                          <a:latin typeface="Pretendard Medium"/>
+                        </a:rPr>
+                        <a:t>7.32분</a:t>
+                      </a:r>
+                    </a:p>
+                  </a:txBody>
+                  <a:tcPr marL="101600" marR="101600" marT="101600" marB="101600" anchor="ctr">
+                    <a:solidFill>
+                      <a:srgbClr val="FFFFFF"/>
+                    </a:solidFill>
+                    <a:lnL w="0">
+                      <a:noFill/>
+                    </a:lnL>
+                    <a:lnR w="0">
+                      <a:noFill/>
+                    </a:lnR>
+                    <a:lnT w="0">
+                      <a:noFill/>
+                    </a:lnT>
+                    <a:lnB w="9525">
+                      <a:solidFill>
+                        <a:srgbClr val="E2E2E2"/>
+                      </a:solidFill>
+                    </a:lnB>
+                  </a:tcPr>
+                </a:tc>
+                <a:tc>
+                  <a:txBody>
+                    <a:bodyPr/>
+                    <a:lstStyle/>
+                    <a:p>
+                      <a:r>
+                        <a:rPr sz="1300" b="0">
+                          <a:solidFill>
+                            <a:srgbClr val="5E5E5E"/>
+                          </a:solidFill>
+                          <a:latin typeface="Pretendard Medium"/>
+                        </a:rPr>
+                        <a:t>0.39</a:t>
+                      </a:r>
+                    </a:p>
+                  </a:txBody>
+                  <a:tcPr marL="101600" marR="101600" marT="101600" marB="101600" anchor="ctr">
+                    <a:solidFill>
+                      <a:srgbClr val="FFFFFF"/>
+                    </a:solidFill>
+                    <a:lnL w="0">
+                      <a:noFill/>
+                    </a:lnL>
+                    <a:lnR w="0">
+                      <a:noFill/>
+                    </a:lnR>
+                    <a:lnT w="0">
+                      <a:noFill/>
+                    </a:lnT>
+                    <a:lnB w="9525">
+                      <a:solidFill>
+                        <a:srgbClr val="E2E2E2"/>
+                      </a:solidFill>
+                    </a:lnB>
+                  </a:tcPr>
+                </a:tc>
+              </a:tr>
+              <a:tr h="635000">
+                <a:tc>
+                  <a:txBody>
+                    <a:bodyPr/>
+                    <a:lstStyle/>
+                    <a:p>
+                      <a:r>
+                        <a:rPr sz="1300" b="1">
+                          <a:solidFill>
+                            <a:srgbClr val="000000"/>
+                          </a:solidFill>
+                          <a:latin typeface="Pretendard"/>
+                        </a:rPr>
+                        <a:t>60대</a:t>
+                      </a:r>
+                    </a:p>
+                  </a:txBody>
+                  <a:tcPr marL="101600" marR="101600" marT="101600" marB="101600" anchor="ctr">
+                    <a:solidFill>
+                      <a:srgbClr val="FFFFFF"/>
+                    </a:solidFill>
+                    <a:lnL w="0">
+                      <a:noFill/>
+                    </a:lnL>
+                    <a:lnR w="0">
+                      <a:noFill/>
+                    </a:lnR>
+                    <a:lnT w="0">
+                      <a:noFill/>
+                    </a:lnT>
+                    <a:lnB w="9525">
+                      <a:solidFill>
+                        <a:srgbClr val="E2E2E2"/>
+                      </a:solidFill>
+                    </a:lnB>
+                  </a:tcPr>
+                </a:tc>
+                <a:tc>
+                  <a:txBody>
+                    <a:bodyPr/>
+                    <a:lstStyle/>
+                    <a:p>
+                      <a:r>
+                        <a:rPr sz="1300" b="0">
+                          <a:solidFill>
+                            <a:srgbClr val="5E5E5E"/>
+                          </a:solidFill>
+                          <a:latin typeface="Pretendard Medium"/>
+                        </a:rPr>
+                        <a:t>7.21분</a:t>
+                      </a:r>
+                    </a:p>
+                  </a:txBody>
+                  <a:tcPr marL="101600" marR="101600" marT="101600" marB="101600" anchor="ctr">
+                    <a:solidFill>
+                      <a:srgbClr val="FFFFFF"/>
+                    </a:solidFill>
+                    <a:lnL w="0">
+                      <a:noFill/>
+                    </a:lnL>
+                    <a:lnR w="0">
+                      <a:noFill/>
+                    </a:lnR>
+                    <a:lnT w="0">
+                      <a:noFill/>
+                    </a:lnT>
+                    <a:lnB w="9525">
+                      <a:solidFill>
+                        <a:srgbClr val="E2E2E2"/>
+                      </a:solidFill>
+                    </a:lnB>
+                  </a:tcPr>
+                </a:tc>
+                <a:tc>
+                  <a:txBody>
+                    <a:bodyPr/>
+                    <a:lstStyle/>
+                    <a:p>
+                      <a:r>
+                        <a:rPr sz="1300" b="0">
+                          <a:solidFill>
+                            <a:srgbClr val="5E5E5E"/>
+                          </a:solidFill>
+                          <a:latin typeface="Pretendard Medium"/>
+                        </a:rPr>
+                        <a:t>—</a:t>
+                      </a:r>
+                    </a:p>
+                  </a:txBody>
+                  <a:tcPr marL="101600" marR="101600" marT="101600" marB="101600" anchor="ctr">
+                    <a:solidFill>
+                      <a:srgbClr val="FFFFFF"/>
+                    </a:solidFill>
+                    <a:lnL w="0">
+                      <a:noFill/>
+                    </a:lnL>
+                    <a:lnR w="0">
+                      <a:noFill/>
+                    </a:lnR>
+                    <a:lnT w="0">
+                      <a:noFill/>
+                    </a:lnT>
+                    <a:lnB w="9525">
+                      <a:solidFill>
+                        <a:srgbClr val="E2E2E2"/>
+                      </a:solidFill>
+                    </a:lnB>
+                  </a:tcPr>
+                </a:tc>
+              </a:tr>
+              <a:tr h="635000">
+                <a:tc>
+                  <a:txBody>
+                    <a:bodyPr/>
+                    <a:lstStyle/>
+                    <a:p>
+                      <a:r>
+                        <a:rPr sz="1300" b="1">
+                          <a:solidFill>
+                            <a:srgbClr val="000000"/>
+                          </a:solidFill>
+                          <a:latin typeface="Pretendard"/>
+                        </a:rPr>
+                        <a:t>80대</a:t>
+                      </a:r>
+                    </a:p>
+                  </a:txBody>
+                  <a:tcPr marL="101600" marR="101600" marT="101600" marB="101600" anchor="ctr">
+                    <a:solidFill>
+                      <a:srgbClr val="FFFFFF"/>
+                    </a:solidFill>
+                    <a:lnL w="0">
+                      <a:noFill/>
+                    </a:lnL>
+                    <a:lnR w="0">
+                      <a:noFill/>
+                    </a:lnR>
+                    <a:lnT w="0">
+                      <a:noFill/>
+                    </a:lnT>
+                    <a:lnB w="9525">
+                      <a:solidFill>
+                        <a:srgbClr val="E2E2E2"/>
+                      </a:solidFill>
+                    </a:lnB>
+                  </a:tcPr>
+                </a:tc>
+                <a:tc>
+                  <a:txBody>
+                    <a:bodyPr/>
+                    <a:lstStyle/>
+                    <a:p>
+                      <a:r>
+                        <a:rPr sz="1300" b="0">
+                          <a:solidFill>
+                            <a:srgbClr val="5E5E5E"/>
+                          </a:solidFill>
+                          <a:latin typeface="Pretendard Medium"/>
+                        </a:rPr>
+                        <a:t>4.28분</a:t>
+                      </a:r>
+                    </a:p>
+                  </a:txBody>
+                  <a:tcPr marL="101600" marR="101600" marT="101600" marB="101600" anchor="ctr">
+                    <a:solidFill>
+                      <a:srgbClr val="FFFFFF"/>
+                    </a:solidFill>
+                    <a:lnL w="0">
+                      <a:noFill/>
+                    </a:lnL>
+                    <a:lnR w="0">
+                      <a:noFill/>
+                    </a:lnR>
+                    <a:lnT w="0">
+                      <a:noFill/>
+                    </a:lnT>
+                    <a:lnB w="9525">
+                      <a:solidFill>
+                        <a:srgbClr val="E2E2E2"/>
+                      </a:solidFill>
+                    </a:lnB>
+                  </a:tcPr>
+                </a:tc>
+                <a:tc>
+                  <a:txBody>
+                    <a:bodyPr/>
+                    <a:lstStyle/>
+                    <a:p>
+                      <a:r>
+                        <a:rPr sz="1300" b="0">
+                          <a:solidFill>
+                            <a:srgbClr val="5E5E5E"/>
+                          </a:solidFill>
+                          <a:latin typeface="Pretendard Medium"/>
+                        </a:rPr>
+                        <a:t>1.00</a:t>
+                      </a:r>
+                    </a:p>
+                  </a:txBody>
+                  <a:tcPr marL="101600" marR="101600" marT="101600" marB="101600" anchor="ctr">
+                    <a:solidFill>
+                      <a:srgbClr val="FFFFFF"/>
+                    </a:solidFill>
+                    <a:lnL w="0">
+                      <a:noFill/>
+                    </a:lnL>
+                    <a:lnR w="0">
+                      <a:noFill/>
+                    </a:lnR>
+                    <a:lnT w="0">
+                      <a:noFill/>
+                    </a:lnT>
+                    <a:lnB w="9525">
+                      <a:solidFill>
+                        <a:srgbClr val="E2E2E2"/>
+                      </a:solidFill>
+                    </a:lnB>
+                  </a:tcPr>
+                </a:tc>
+              </a:tr>
+            </a:tbl>
+          </a:graphicData>
+        </a:graphic>
+      </p:graphicFrame>
       <p:sp>
         <p:nvSpPr>
           <p:cNvPr id="25" name="Slide Number Placeholder 0"/>
@@ -5207,7 +5736,7 @@
             <a:pPr algn="r"/>
             <a:fld id="{F7021451-1387-4CA6-816F-3879F97B5CBC}" type="slidenum">
               <a:rPr b="0" lang="en-US"/>
-              <a:t>1004</a:t>
+              <a:t>1008</a:t>
             </a:fld>
             <a:endParaRPr lang="en-US"/>
           </a:p>
@@ -5222,6 +5751,172 @@
 </file>
 
 <file path=ppt/slides/slide11.xml><?xml version="1.0" encoding="utf-8"?>
+<p:sld xmlns:a="http://schemas.openxmlformats.org/drawingml/2006/main" xmlns:p="http://schemas.openxmlformats.org/presentationml/2006/main" xmlns:r="http://schemas.openxmlformats.org/officeDocument/2006/relationships">
+  <p:cSld>
+    <p:spTree>
+      <p:nvGrpSpPr>
+        <p:cNvPr id="1" name=""/>
+        <p:cNvGrpSpPr/>
+        <p:nvPr/>
+      </p:nvGrpSpPr>
+      <p:grpSpPr/>
+      <p:sp>
+        <p:nvSpPr>
+          <p:cNvPr id="2" name="Title 1"/>
+          <p:cNvSpPr>
+            <a:spLocks noGrp="1"/>
+          </p:cNvSpPr>
+          <p:nvPr>
+            <p:ph type="title" idx="100"/>
+          </p:nvPr>
+        </p:nvSpPr>
+        <p:spPr/>
+        <p:txBody>
+          <a:bodyPr/>
+          <a:lstStyle/>
+          <a:p>
+            <a:r>
+              <a:t>3.2 포기 승객을 세는 방법</a:t>
+            </a:r>
+          </a:p>
+        </p:txBody>
+      </p:sp>
+      <p:sp>
+        <p:nvSpPr>
+          <p:cNvPr id="3" name="Text Placeholder 2"/>
+          <p:cNvSpPr>
+            <a:spLocks noGrp="1"/>
+          </p:cNvSpPr>
+          <p:nvPr>
+            <p:ph type="body" idx="101"/>
+          </p:nvPr>
+        </p:nvSpPr>
+        <p:spPr/>
+        <p:txBody>
+          <a:bodyPr/>
+          <a:lstStyle/>
+          <a:p>
+            <a:r>
+              <a:t>3. 교재 12.2–12.3 생존 편향과 분포</a:t>
+            </a:r>
+          </a:p>
+        </p:txBody>
+      </p:sp>
+      <p:sp>
+        <p:nvSpPr>
+          <p:cNvPr id="4" name="Text Placeholder 3"/>
+          <p:cNvSpPr>
+            <a:spLocks noGrp="1"/>
+          </p:cNvSpPr>
+          <p:nvPr>
+            <p:ph type="body" idx="102"/>
+          </p:nvPr>
+        </p:nvSpPr>
+        <p:spPr/>
+        <p:txBody>
+          <a:bodyPr/>
+          <a:lstStyle/>
+          <a:p>
+            <a:pPr/>
+            <a:r>
+              <a:t>방법 1: 배차된 승객만 집계</a:t>
+            </a:r>
+          </a:p>
+          <a:p>
+            <a:pPr/>
+            <a:r>
+              <a:t>방법 2: 포기 승객에게 벌점 시간 부여 — 예를 들어 30분</a:t>
+            </a:r>
+          </a:p>
+          <a:p>
+            <a:pPr lvl="1"/>
+            <a:r>
+              <a:t>20대 시나리오가 21분 초과, 80대는 4.28분 — 순위 역전</a:t>
+            </a:r>
+          </a:p>
+          <a:p>
+            <a:pPr/>
+            <a:r>
+              <a:t>선택 기준은 답하려는 질문</a:t>
+            </a:r>
+          </a:p>
+          <a:p>
+            <a:pPr lvl="1"/>
+            <a:r>
+              <a:t>택시를 탄 사람의 대기 시간 → 방법 1</a:t>
+            </a:r>
+          </a:p>
+          <a:p>
+            <a:pPr lvl="1"/>
+            <a:r>
+              <a:t>이 지역에서 택시를 부를 때의 소요 → 방법 2</a:t>
+            </a:r>
+          </a:p>
+          <a:p>
+            <a:pPr/>
+            <a:r>
+              <a:t>보고서 원칙: 서비스율과 대기시간을 항상 함께 기재</a:t>
+            </a:r>
+          </a:p>
+        </p:txBody>
+      </p:sp>
+      <p:sp>
+        <p:nvSpPr>
+          <p:cNvPr id="25" name="Slide Number Placeholder 0"/>
+          <p:cNvSpPr>
+            <a:spLocks noGrp="1"/>
+          </p:cNvSpPr>
+          <p:nvPr>
+            <p:ph type="sldNum" sz="quarter" idx="4294967295"/>
+          </p:nvPr>
+        </p:nvSpPr>
+        <p:spPr>
+          <a:xfrm>
+            <a:off x="10591495" y="6355080"/>
+            <a:ext cx="914400" cy="274320"/>
+          </a:xfrm>
+          <a:prstGeom prst="rect">
+            <a:avLst/>
+          </a:prstGeom>
+          <a:extLst>
+            <a:ext uri="{C572A759-6A51-4108-AA02-DFA0A04FC94B}">
+              <ma14:wrappingTextBoxFlag xmlns:ma14="http://schemas.microsoft.com/office/mac/drawingml/2011/main" val="0"/>
+            </a:ext>
+          </a:extLst>
+        </p:spPr>
+        <p:txBody>
+          <a:bodyPr/>
+          <a:lstStyle>
+            <a:lvl1pPr>
+              <a:defRPr sz="1000">
+                <a:solidFill>
+                  <a:srgbClr val="AFAFAF"/>
+                </a:solidFill>
+                <a:latin typeface="Pretendard Medium"/>
+                <a:ea typeface="Pretendard Medium"/>
+                <a:cs typeface="Pretendard Medium"/>
+              </a:defRPr>
+            </a:lvl1pPr>
+          </a:lstStyle>
+          <a:p>
+            <a:pPr algn="r"/>
+            <a:fld id="{F7021451-1387-4CA6-816F-3879F97B5CBC}" type="slidenum">
+              <a:rPr b="0" lang="en-US"/>
+              <a:t>1004</a:t>
+            </a:fld>
+            <a:endParaRPr lang="en-US"/>
+          </a:p>
+        </p:txBody>
+      </p:sp>
+    </p:spTree>
+  </p:cSld>
+  <p:clrMapOvr>
+    <a:masterClrMapping/>
+  </p:clrMapOvr>
+</p:sld>
+</file>
+
+<file path=ppt/slides/slide12.xml><?xml version="1.0" encoding="utf-8"?>
 <p:sld xmlns:a="http://schemas.openxmlformats.org/drawingml/2006/main" xmlns:p="http://schemas.openxmlformats.org/presentationml/2006/main" xmlns:r="http://schemas.openxmlformats.org/officeDocument/2006/relationships">
   <p:cSld>
     <p:spTree>
@@ -5408,7 +6103,7 @@
 </p:sld>
 </file>
 
-<file path=ppt/slides/slide12.xml><?xml version="1.0" encoding="utf-8"?>
+<file path=ppt/slides/slide13.xml><?xml version="1.0" encoding="utf-8"?>
 <p:sld xmlns:a="http://schemas.openxmlformats.org/drawingml/2006/main" xmlns:p="http://schemas.openxmlformats.org/presentationml/2006/main" xmlns:r="http://schemas.openxmlformats.org/officeDocument/2006/relationships">
   <p:cSld>
     <p:spTree>
@@ -5520,7 +6215,7 @@
 </p:sld>
 </file>
 
-<file path=ppt/slides/slide13.xml><?xml version="1.0" encoding="utf-8"?>
+<file path=ppt/slides/slide14.xml><?xml version="1.0" encoding="utf-8"?>
 <p:sld xmlns:a="http://schemas.openxmlformats.org/drawingml/2006/main" xmlns:p="http://schemas.openxmlformats.org/presentationml/2006/main" xmlns:r="http://schemas.openxmlformats.org/officeDocument/2006/relationships">
   <p:cSld>
     <p:spTree>
@@ -5713,7 +6408,7 @@
 </p:sld>
 </file>
 
-<file path=ppt/slides/slide14.xml><?xml version="1.0" encoding="utf-8"?>
+<file path=ppt/slides/slide15.xml><?xml version="1.0" encoding="utf-8"?>
 <p:sld xmlns:a="http://schemas.openxmlformats.org/drawingml/2006/main" xmlns:p="http://schemas.openxmlformats.org/presentationml/2006/main" xmlns:r="http://schemas.openxmlformats.org/officeDocument/2006/relationships">
   <p:cSld>
     <p:spTree>
@@ -5856,118 +6551,6 @@
               <a:t>1004</a:t>
             </a:fld>
             <a:endParaRPr lang="en-US"/>
-          </a:p>
-        </p:txBody>
-      </p:sp>
-    </p:spTree>
-  </p:cSld>
-  <p:clrMapOvr>
-    <a:masterClrMapping/>
-  </p:clrMapOvr>
-</p:sld>
-</file>
-
-<file path=ppt/slides/slide15.xml><?xml version="1.0" encoding="utf-8"?>
-<p:sld xmlns:a="http://schemas.openxmlformats.org/drawingml/2006/main" xmlns:p="http://schemas.openxmlformats.org/presentationml/2006/main" xmlns:r="http://schemas.openxmlformats.org/officeDocument/2006/relationships">
-  <p:cSld>
-    <p:spTree>
-      <p:nvGrpSpPr>
-        <p:cNvPr id="1" name=""/>
-        <p:cNvGrpSpPr/>
-        <p:nvPr/>
-      </p:nvGrpSpPr>
-      <p:grpSpPr/>
-      <p:sp>
-        <p:nvSpPr>
-          <p:cNvPr id="2" name="Text Placeholder 1"/>
-          <p:cNvSpPr>
-            <a:spLocks noGrp="1"/>
-          </p:cNvSpPr>
-          <p:nvPr>
-            <p:ph type="body" idx="100"/>
-          </p:nvPr>
-        </p:nvSpPr>
-        <p:spPr/>
-        <p:txBody>
-          <a:bodyPr/>
-          <a:lstStyle/>
-          <a:p>
-            <a:r>
-              <a:t>05</a:t>
-            </a:r>
-          </a:p>
-        </p:txBody>
-      </p:sp>
-      <p:sp>
-        <p:nvSpPr>
-          <p:cNvPr id="3" name="Title 2"/>
-          <p:cNvSpPr>
-            <a:spLocks noGrp="1"/>
-          </p:cNvSpPr>
-          <p:nvPr>
-            <p:ph type="title" idx="101"/>
-          </p:nvPr>
-        </p:nvSpPr>
-        <p:spPr/>
-        <p:txBody>
-          <a:bodyPr/>
-          <a:lstStyle/>
-          <a:p>
-            <a:r>
-              <a:t>교재 12.6–12.7 시간대와 공간</a:t>
-            </a:r>
-          </a:p>
-        </p:txBody>
-      </p:sp>
-      <p:sp>
-        <p:nvSpPr>
-          <p:cNvPr id="4" name="Text Placeholder 3"/>
-          <p:cNvSpPr>
-            <a:spLocks noGrp="1"/>
-          </p:cNvSpPr>
-          <p:nvPr>
-            <p:ph type="body" idx="102"/>
-          </p:nvPr>
-        </p:nvSpPr>
-        <p:spPr/>
-        <p:txBody>
-          <a:bodyPr/>
-          <a:lstStyle/>
-          <a:p>
-            <a:pPr>
-              <a:spcAft>
-                <a:spcPts val="1000"/>
-              </a:spcAft>
-            </a:pPr>
-            <a:r>
-              <a:rPr>
-                <a:solidFill>
-                  <a:srgbClr val="AFAFAF"/>
-                </a:solidFill>
-              </a:rPr>
-              <a:t>5.1  </a:t>
-            </a:r>
-            <a:r>
-              <a:t>시간대별 변화</a:t>
-            </a:r>
-          </a:p>
-          <a:p>
-            <a:pPr>
-              <a:spcAft>
-                <a:spcPts val="1000"/>
-              </a:spcAft>
-            </a:pPr>
-            <a:r>
-              <a:rPr>
-                <a:solidFill>
-                  <a:srgbClr val="AFAFAF"/>
-                </a:solidFill>
-              </a:rPr>
-              <a:t>5.2  </a:t>
-            </a:r>
-            <a:r>
-              <a:t>오래 기다린 승객의 위치</a:t>
-            </a:r>
           </a:p>
         </p:txBody>
       </p:sp>
@@ -5991,12 +6574,12 @@
       <p:grpSpPr/>
       <p:sp>
         <p:nvSpPr>
-          <p:cNvPr id="2" name="Title 1"/>
-          <p:cNvSpPr>
-            <a:spLocks noGrp="1"/>
-          </p:cNvSpPr>
-          <p:nvPr>
-            <p:ph type="title" idx="100"/>
+          <p:cNvPr id="2" name="Text Placeholder 1"/>
+          <p:cNvSpPr>
+            <a:spLocks noGrp="1"/>
+          </p:cNvSpPr>
+          <p:nvPr>
+            <p:ph type="body" idx="100"/>
           </p:nvPr>
         </p:nvSpPr>
         <p:spPr/>
@@ -6005,19 +6588,19 @@
           <a:lstStyle/>
           <a:p>
             <a:r>
-              <a:t>5.1 시간대별 변화</a:t>
-            </a:r>
-          </a:p>
-        </p:txBody>
-      </p:sp>
-      <p:sp>
-        <p:nvSpPr>
-          <p:cNvPr id="3" name="Text Placeholder 2"/>
-          <p:cNvSpPr>
-            <a:spLocks noGrp="1"/>
-          </p:cNvSpPr>
-          <p:nvPr>
-            <p:ph type="body" idx="101"/>
+              <a:t>05</a:t>
+            </a:r>
+          </a:p>
+        </p:txBody>
+      </p:sp>
+      <p:sp>
+        <p:nvSpPr>
+          <p:cNvPr id="3" name="Title 2"/>
+          <p:cNvSpPr>
+            <a:spLocks noGrp="1"/>
+          </p:cNvSpPr>
+          <p:nvPr>
+            <p:ph type="title" idx="101"/>
           </p:nvPr>
         </p:nvSpPr>
         <p:spPr/>
@@ -6026,7 +6609,7 @@
           <a:lstStyle/>
           <a:p>
             <a:r>
-              <a:t>5. 교재 12.6–12.7 시간대와 공간</a:t>
+              <a:t>교재 12.6–12.7 시간대와 공간</a:t>
             </a:r>
           </a:p>
         </p:txBody>
@@ -6046,76 +6629,40 @@
           <a:bodyPr/>
           <a:lstStyle/>
           <a:p>
-            <a:pPr/>
-            <a:r>
-              <a:t>한 숫자로 요약하면 시간에 따른 변화가 사라짐</a:t>
-            </a:r>
-          </a:p>
-          <a:p>
-            <a:pPr/>
-            <a:r>
-              <a:t>분 단위 기록을 시간 단위로 집계해 확인</a:t>
-            </a:r>
-          </a:p>
-          <a:p>
-            <a:pPr/>
-            <a:r>
-              <a:t>저녁 6시 시작, 밤 10시경 운행 차량 정점</a:t>
-            </a:r>
-          </a:p>
-          <a:p>
-            <a:pPr/>
-            <a:r>
-              <a:t>자정에 근접할수록 근무 종료로 차량 감소</a:t>
-            </a:r>
-          </a:p>
-        </p:txBody>
-      </p:sp>
-      <p:sp>
-        <p:nvSpPr>
-          <p:cNvPr id="25" name="Slide Number Placeholder 0"/>
-          <p:cNvSpPr>
-            <a:spLocks noGrp="1"/>
-          </p:cNvSpPr>
-          <p:nvPr>
-            <p:ph type="sldNum" sz="quarter" idx="4294967295"/>
-          </p:nvPr>
-        </p:nvSpPr>
-        <p:spPr>
-          <a:xfrm>
-            <a:off x="10591495" y="6355080"/>
-            <a:ext cx="914400" cy="274320"/>
-          </a:xfrm>
-          <a:prstGeom prst="rect">
-            <a:avLst/>
-          </a:prstGeom>
-          <a:extLst>
-            <a:ext uri="{C572A759-6A51-4108-AA02-DFA0A04FC94B}">
-              <ma14:wrappingTextBoxFlag xmlns:ma14="http://schemas.microsoft.com/office/mac/drawingml/2011/main" val="0"/>
-            </a:ext>
-          </a:extLst>
-        </p:spPr>
-        <p:txBody>
-          <a:bodyPr/>
-          <a:lstStyle>
-            <a:lvl1pPr>
-              <a:defRPr sz="1000">
+            <a:pPr>
+              <a:spcAft>
+                <a:spcPts val="1000"/>
+              </a:spcAft>
+            </a:pPr>
+            <a:r>
+              <a:rPr>
                 <a:solidFill>
                   <a:srgbClr val="AFAFAF"/>
                 </a:solidFill>
-                <a:latin typeface="Pretendard Medium"/>
-                <a:ea typeface="Pretendard Medium"/>
-                <a:cs typeface="Pretendard Medium"/>
-              </a:defRPr>
-            </a:lvl1pPr>
-          </a:lstStyle>
-          <a:p>
-            <a:pPr algn="r"/>
-            <a:fld id="{F7021451-1387-4CA6-816F-3879F97B5CBC}" type="slidenum">
-              <a:rPr b="0" lang="en-US"/>
-              <a:t>1004</a:t>
-            </a:fld>
-            <a:endParaRPr lang="en-US"/>
+              </a:rPr>
+              <a:t>5.1  </a:t>
+            </a:r>
+            <a:r>
+              <a:t>시간대별 변화</a:t>
+            </a:r>
+          </a:p>
+          <a:p>
+            <a:pPr>
+              <a:spcAft>
+                <a:spcPts val="1000"/>
+              </a:spcAft>
+            </a:pPr>
+            <a:r>
+              <a:rPr>
+                <a:solidFill>
+                  <a:srgbClr val="AFAFAF"/>
+                </a:solidFill>
+              </a:rPr>
+              <a:t>5.2  </a:t>
+            </a:r>
+            <a:r>
+              <a:t>오래 기다린 승객의 위치</a:t>
+            </a:r>
           </a:p>
         </p:txBody>
       </p:sp>
@@ -6153,7 +6700,7 @@
           <a:lstStyle/>
           <a:p>
             <a:r>
-              <a:t>5.2 오래 기다린 승객의 위치</a:t>
+              <a:t>5.1 시간대별 변화</a:t>
             </a:r>
           </a:p>
         </p:txBody>
@@ -6196,25 +6743,25 @@
           <a:p>
             <a:pPr/>
             <a:r>
-              <a:t>10분 초과 대기 승객의 호출 위치를 지도에 표시</a:t>
+              <a:t>한 숫자로 요약하면 시간에 따른 변화가 사라짐</a:t>
             </a:r>
           </a:p>
           <a:p>
             <a:pPr/>
             <a:r>
-              <a:t>결과: 시가지가 아니라 외곽에 집중</a:t>
+              <a:t>분 단위 기록을 시간 단위로 집계해 확인</a:t>
             </a:r>
           </a:p>
           <a:p>
             <a:pPr/>
             <a:r>
-              <a:t>해석: 차량이 시가지 중심에 머무는 동안 외곽 호출이 지연</a:t>
+              <a:t>저녁 6시 시작, 밤 10시경 운행 차량 정점</a:t>
             </a:r>
           </a:p>
           <a:p>
             <a:pPr/>
             <a:r>
-              <a:t>차량 재배치가 필요한 지점이 지도에서 확인됨</a:t>
+              <a:t>자정에 근접할수록 근무 종료로 차량 감소</a:t>
             </a:r>
           </a:p>
         </p:txBody>
@@ -6287,12 +6834,12 @@
       <p:grpSpPr/>
       <p:sp>
         <p:nvSpPr>
-          <p:cNvPr id="2" name="Text Placeholder 1"/>
-          <p:cNvSpPr>
-            <a:spLocks noGrp="1"/>
-          </p:cNvSpPr>
-          <p:nvPr>
-            <p:ph type="body" idx="100"/>
+          <p:cNvPr id="2" name="Title 1"/>
+          <p:cNvSpPr>
+            <a:spLocks noGrp="1"/>
+          </p:cNvSpPr>
+          <p:nvPr>
+            <p:ph type="title" idx="100"/>
           </p:nvPr>
         </p:nvSpPr>
         <p:spPr/>
@@ -6301,19 +6848,19 @@
           <a:lstStyle/>
           <a:p>
             <a:r>
-              <a:t>06</a:t>
-            </a:r>
-          </a:p>
-        </p:txBody>
-      </p:sp>
-      <p:sp>
-        <p:nvSpPr>
-          <p:cNvPr id="3" name="Title 2"/>
-          <p:cNvSpPr>
-            <a:spLocks noGrp="1"/>
-          </p:cNvSpPr>
-          <p:nvPr>
-            <p:ph type="title" idx="101"/>
+              <a:t>5.2 오래 기다린 승객의 위치</a:t>
+            </a:r>
+          </a:p>
+        </p:txBody>
+      </p:sp>
+      <p:sp>
+        <p:nvSpPr>
+          <p:cNvPr id="3" name="Text Placeholder 2"/>
+          <p:cNvSpPr>
+            <a:spLocks noGrp="1"/>
+          </p:cNvSpPr>
+          <p:nvPr>
+            <p:ph type="body" idx="101"/>
           </p:nvPr>
         </p:nvSpPr>
         <p:spPr/>
@@ -6322,7 +6869,7 @@
           <a:lstStyle/>
           <a:p>
             <a:r>
-              <a:t>교재 12.8 보고서와 정리</a:t>
+              <a:t>5. 교재 12.6–12.7 시간대와 공간</a:t>
             </a:r>
           </a:p>
         </p:txBody>
@@ -6342,58 +6889,76 @@
           <a:bodyPr/>
           <a:lstStyle/>
           <a:p>
-            <a:pPr>
-              <a:spcAft>
-                <a:spcPts val="1000"/>
-              </a:spcAft>
-            </a:pPr>
-            <a:r>
-              <a:rPr>
+            <a:pPr/>
+            <a:r>
+              <a:t>10분 초과 대기 승객의 호출 위치를 지도에 표시</a:t>
+            </a:r>
+          </a:p>
+          <a:p>
+            <a:pPr/>
+            <a:r>
+              <a:t>결과: 시가지가 아니라 외곽에 집중</a:t>
+            </a:r>
+          </a:p>
+          <a:p>
+            <a:pPr/>
+            <a:r>
+              <a:t>해석: 차량이 시가지 중심에 머무는 동안 외곽 호출이 지연</a:t>
+            </a:r>
+          </a:p>
+          <a:p>
+            <a:pPr/>
+            <a:r>
+              <a:t>차량 재배치가 필요한 지점이 지도에서 확인됨</a:t>
+            </a:r>
+          </a:p>
+        </p:txBody>
+      </p:sp>
+      <p:sp>
+        <p:nvSpPr>
+          <p:cNvPr id="25" name="Slide Number Placeholder 0"/>
+          <p:cNvSpPr>
+            <a:spLocks noGrp="1"/>
+          </p:cNvSpPr>
+          <p:nvPr>
+            <p:ph type="sldNum" sz="quarter" idx="4294967295"/>
+          </p:nvPr>
+        </p:nvSpPr>
+        <p:spPr>
+          <a:xfrm>
+            <a:off x="10591495" y="6355080"/>
+            <a:ext cx="914400" cy="274320"/>
+          </a:xfrm>
+          <a:prstGeom prst="rect">
+            <a:avLst/>
+          </a:prstGeom>
+          <a:extLst>
+            <a:ext uri="{C572A759-6A51-4108-AA02-DFA0A04FC94B}">
+              <ma14:wrappingTextBoxFlag xmlns:ma14="http://schemas.microsoft.com/office/mac/drawingml/2011/main" val="0"/>
+            </a:ext>
+          </a:extLst>
+        </p:spPr>
+        <p:txBody>
+          <a:bodyPr/>
+          <a:lstStyle>
+            <a:lvl1pPr>
+              <a:defRPr sz="1000">
                 <a:solidFill>
                   <a:srgbClr val="AFAFAF"/>
                 </a:solidFill>
-              </a:rPr>
-              <a:t>6.1  </a:t>
-            </a:r>
-            <a:r>
-              <a:t>보고서 결과 절의 구성</a:t>
-            </a:r>
-          </a:p>
-          <a:p>
-            <a:pPr>
-              <a:spcAft>
-                <a:spcPts val="1000"/>
-              </a:spcAft>
-            </a:pPr>
-            <a:r>
-              <a:rPr>
-                <a:solidFill>
-                  <a:srgbClr val="AFAFAF"/>
-                </a:solidFill>
-              </a:rPr>
-              <a:t>6.2  </a:t>
-            </a:r>
-            <a:r>
-              <a:t>오늘의 정리</a:t>
-            </a:r>
-          </a:p>
-          <a:p>
-            <a:pPr>
-              <a:spcAft>
-                <a:spcPts val="1000"/>
-              </a:spcAft>
-            </a:pPr>
-            <a:r>
-              <a:rPr>
-                <a:solidFill>
-                  <a:srgbClr val="AFAFAF"/>
-                </a:solidFill>
-              </a:rPr>
-              <a:t>6.3  </a:t>
-            </a:r>
-            <a:r>
-              <a:t>연습과 다음 주</a:t>
-            </a:r>
+                <a:latin typeface="Pretendard Medium"/>
+                <a:ea typeface="Pretendard Medium"/>
+                <a:cs typeface="Pretendard Medium"/>
+              </a:defRPr>
+            </a:lvl1pPr>
+          </a:lstStyle>
+          <a:p>
+            <a:pPr algn="r"/>
+            <a:fld id="{F7021451-1387-4CA6-816F-3879F97B5CBC}" type="slidenum">
+              <a:rPr b="0" lang="en-US"/>
+              <a:t>1004</a:t>
+            </a:fld>
+            <a:endParaRPr lang="en-US"/>
           </a:p>
         </p:txBody>
       </p:sp>
@@ -6417,12 +6982,12 @@
       <p:grpSpPr/>
       <p:sp>
         <p:nvSpPr>
-          <p:cNvPr id="2" name="Title 1"/>
-          <p:cNvSpPr>
-            <a:spLocks noGrp="1"/>
-          </p:cNvSpPr>
-          <p:nvPr>
-            <p:ph type="title" idx="100"/>
+          <p:cNvPr id="2" name="Text Placeholder 1"/>
+          <p:cNvSpPr>
+            <a:spLocks noGrp="1"/>
+          </p:cNvSpPr>
+          <p:nvPr>
+            <p:ph type="body" idx="100"/>
           </p:nvPr>
         </p:nvSpPr>
         <p:spPr/>
@@ -6431,19 +6996,19 @@
           <a:lstStyle/>
           <a:p>
             <a:r>
-              <a:t>6.1 보고서 결과 절의 구성</a:t>
-            </a:r>
-          </a:p>
-        </p:txBody>
-      </p:sp>
-      <p:sp>
-        <p:nvSpPr>
-          <p:cNvPr id="3" name="Text Placeholder 2"/>
-          <p:cNvSpPr>
-            <a:spLocks noGrp="1"/>
-          </p:cNvSpPr>
-          <p:nvPr>
-            <p:ph type="body" idx="101"/>
+              <a:t>06</a:t>
+            </a:r>
+          </a:p>
+        </p:txBody>
+      </p:sp>
+      <p:sp>
+        <p:nvSpPr>
+          <p:cNvPr id="3" name="Title 2"/>
+          <p:cNvSpPr>
+            <a:spLocks noGrp="1"/>
+          </p:cNvSpPr>
+          <p:nvPr>
+            <p:ph type="title" idx="101"/>
           </p:nvPr>
         </p:nvSpPr>
         <p:spPr/>
@@ -6452,7 +7017,7 @@
           <a:lstStyle/>
           <a:p>
             <a:r>
-              <a:t>6. 교재 12.8 보고서와 정리</a:t>
+              <a:t>교재 12.8 보고서와 정리</a:t>
             </a:r>
           </a:p>
         </p:txBody>
@@ -6472,76 +7037,58 @@
           <a:bodyPr/>
           <a:lstStyle/>
           <a:p>
-            <a:pPr/>
-            <a:r>
-              <a:t>한 문장 결론 — 예를 들어 차량 60대가 하남시 저녁 수요에 적정</a:t>
-            </a:r>
-          </a:p>
-          <a:p>
-            <a:pPr/>
-            <a:r>
-              <a:t>근거 표 — 시나리오별 서비스율, 대기 분위, 가동률, 공차 비율</a:t>
-            </a:r>
-          </a:p>
-          <a:p>
-            <a:pPr/>
-            <a:r>
-              <a:t>그림 세 장 — 분포 히스토그램, 파레토 산점도, 공간 지도</a:t>
-            </a:r>
-          </a:p>
-          <a:p>
-            <a:pPr/>
-            <a:r>
-              <a:t>한계 — 가정한 것과 반영하지 않은 것</a:t>
-            </a:r>
-          </a:p>
-        </p:txBody>
-      </p:sp>
-      <p:sp>
-        <p:nvSpPr>
-          <p:cNvPr id="25" name="Slide Number Placeholder 0"/>
-          <p:cNvSpPr>
-            <a:spLocks noGrp="1"/>
-          </p:cNvSpPr>
-          <p:nvPr>
-            <p:ph type="sldNum" sz="quarter" idx="4294967295"/>
-          </p:nvPr>
-        </p:nvSpPr>
-        <p:spPr>
-          <a:xfrm>
-            <a:off x="10591495" y="6355080"/>
-            <a:ext cx="914400" cy="274320"/>
-          </a:xfrm>
-          <a:prstGeom prst="rect">
-            <a:avLst/>
-          </a:prstGeom>
-          <a:extLst>
-            <a:ext uri="{C572A759-6A51-4108-AA02-DFA0A04FC94B}">
-              <ma14:wrappingTextBoxFlag xmlns:ma14="http://schemas.microsoft.com/office/mac/drawingml/2011/main" val="0"/>
-            </a:ext>
-          </a:extLst>
-        </p:spPr>
-        <p:txBody>
-          <a:bodyPr/>
-          <a:lstStyle>
-            <a:lvl1pPr>
-              <a:defRPr sz="1000">
+            <a:pPr>
+              <a:spcAft>
+                <a:spcPts val="1000"/>
+              </a:spcAft>
+            </a:pPr>
+            <a:r>
+              <a:rPr>
                 <a:solidFill>
                   <a:srgbClr val="AFAFAF"/>
                 </a:solidFill>
-                <a:latin typeface="Pretendard Medium"/>
-                <a:ea typeface="Pretendard Medium"/>
-                <a:cs typeface="Pretendard Medium"/>
-              </a:defRPr>
-            </a:lvl1pPr>
-          </a:lstStyle>
-          <a:p>
-            <a:pPr algn="r"/>
-            <a:fld id="{F7021451-1387-4CA6-816F-3879F97B5CBC}" type="slidenum">
-              <a:rPr b="0" lang="en-US"/>
-              <a:t>1004</a:t>
-            </a:fld>
-            <a:endParaRPr lang="en-US"/>
+              </a:rPr>
+              <a:t>6.1  </a:t>
+            </a:r>
+            <a:r>
+              <a:t>보고서 결과 절의 구성</a:t>
+            </a:r>
+          </a:p>
+          <a:p>
+            <a:pPr>
+              <a:spcAft>
+                <a:spcPts val="1000"/>
+              </a:spcAft>
+            </a:pPr>
+            <a:r>
+              <a:rPr>
+                <a:solidFill>
+                  <a:srgbClr val="AFAFAF"/>
+                </a:solidFill>
+              </a:rPr>
+              <a:t>6.2  </a:t>
+            </a:r>
+            <a:r>
+              <a:t>오늘의 정리</a:t>
+            </a:r>
+          </a:p>
+          <a:p>
+            <a:pPr>
+              <a:spcAft>
+                <a:spcPts val="1000"/>
+              </a:spcAft>
+            </a:pPr>
+            <a:r>
+              <a:rPr>
+                <a:solidFill>
+                  <a:srgbClr val="AFAFAF"/>
+                </a:solidFill>
+              </a:rPr>
+              <a:t>6.3  </a:t>
+            </a:r>
+            <a:r>
+              <a:t>연습과 다음 주</a:t>
+            </a:r>
           </a:p>
         </p:txBody>
       </p:sp>
@@ -6713,7 +7260,7 @@
                           </a:solidFill>
                           <a:latin typeface="Pretendard Medium"/>
                         </a:rPr>
-                        <a:t>1.1 이상한 줄이 있는 표  ·  1.2 학습 목표</a:t>
+                        <a:t>1.1 이상한 줄이 있는 표  ·  1.2 학습 목표  ·  1.3 교재와 실습을 여는 곳</a:t>
                       </a:r>
                     </a:p>
                   </a:txBody>
@@ -7374,7 +7921,7 @@
           <a:lstStyle/>
           <a:p>
             <a:r>
-              <a:t>6.2 오늘의 정리</a:t>
+              <a:t>6.1 보고서 결과 절의 구성</a:t>
             </a:r>
           </a:p>
         </p:txBody>
@@ -7417,25 +7964,25 @@
           <a:p>
             <a:pPr/>
             <a:r>
-              <a:t>지표는 승객, 운영자, 도시 세 관점 — 셋은 서로 상충</a:t>
+              <a:t>한 문장 결론 — 예를 들어 차량 60대가 하남시 저녁 수요에 적정</a:t>
             </a:r>
           </a:p>
           <a:p>
             <a:pPr/>
             <a:r>
-              <a:t>대기시간은 배차 성공자만 집계 — 서비스율과 함께 보지 않으면 생존 편향</a:t>
+              <a:t>근거 표 — 시나리오별 서비스율, 대기 분위, 가동률, 공차 비율</a:t>
             </a:r>
           </a:p>
           <a:p>
             <a:pPr/>
             <a:r>
-              <a:t>평균 대신 중앙값, 90분위, 분포를 확인</a:t>
+              <a:t>그림 세 장 — 분포 히스토그램, 파레토 산점도, 공간 지도</a:t>
             </a:r>
           </a:p>
           <a:p>
             <a:pPr/>
             <a:r>
-              <a:t>남의 결과와 다르면 알고리즘보다 정의와 표본을 먼저 확인</a:t>
+              <a:t>한계 — 가정한 것과 반영하지 않은 것</a:t>
             </a:r>
           </a:p>
         </p:txBody>
@@ -7522,7 +8069,7 @@
           <a:lstStyle/>
           <a:p>
             <a:r>
-              <a:t>6.3 연습과 다음 주</a:t>
+              <a:t>6.2 오늘의 정리</a:t>
             </a:r>
           </a:p>
         </p:txBody>
@@ -7565,37 +8112,25 @@
           <a:p>
             <a:pPr/>
             <a:r>
-              <a:t>연습 12.1 ★ — 90분위와 최댓값 중 서비스 품질 지표 선택</a:t>
-            </a:r>
-          </a:p>
-          <a:p>
-            <a:pPr lvl="1"/>
-            <a:r>
-              <a:t>산출물: 꺾은선 그래프 1장, 선택과 근거 3~4줄</a:t>
+              <a:t>지표는 승객, 운영자, 도시 세 관점 — 셋은 서로 상충</a:t>
             </a:r>
           </a:p>
           <a:p>
             <a:pPr/>
             <a:r>
-              <a:t>연습 12.2 ★★ — 포기 벌점을 15, 30, 60분으로 변경했을 때의 순위 변화</a:t>
-            </a:r>
-          </a:p>
-          <a:p>
-            <a:pPr lvl="1"/>
-            <a:r>
-              <a:t>산출물: 벌점별 순위표, 역전 지점, 보고서 문장 2~3줄</a:t>
+              <a:t>대기시간은 배차 성공자만 집계 — 서비스율과 함께 보지 않으면 생존 편향</a:t>
             </a:r>
           </a:p>
           <a:p>
             <a:pPr/>
             <a:r>
-              <a:t>연습 12.3 ★★★ — 공간 형평성 지표 정의와 구현</a:t>
+              <a:t>평균 대신 중앙값, 90분위, 분포를 확인</a:t>
             </a:r>
           </a:p>
           <a:p>
             <a:pPr/>
             <a:r>
-              <a:t>다음 주: 8주차 휴강, HW3 무당이 GTFS 작성과 승하차 조사 (팀)</a:t>
+              <a:t>남의 결과와 다르면 알고리즘보다 정의와 표본을 먼저 확인</a:t>
             </a:r>
           </a:p>
         </p:txBody>
@@ -7682,6 +8217,166 @@
           <a:lstStyle/>
           <a:p>
             <a:r>
+              <a:t>6.3 연습과 다음 주</a:t>
+            </a:r>
+          </a:p>
+        </p:txBody>
+      </p:sp>
+      <p:sp>
+        <p:nvSpPr>
+          <p:cNvPr id="3" name="Text Placeholder 2"/>
+          <p:cNvSpPr>
+            <a:spLocks noGrp="1"/>
+          </p:cNvSpPr>
+          <p:nvPr>
+            <p:ph type="body" idx="101"/>
+          </p:nvPr>
+        </p:nvSpPr>
+        <p:spPr/>
+        <p:txBody>
+          <a:bodyPr/>
+          <a:lstStyle/>
+          <a:p>
+            <a:r>
+              <a:t>6. 교재 12.8 보고서와 정리</a:t>
+            </a:r>
+          </a:p>
+        </p:txBody>
+      </p:sp>
+      <p:sp>
+        <p:nvSpPr>
+          <p:cNvPr id="4" name="Text Placeholder 3"/>
+          <p:cNvSpPr>
+            <a:spLocks noGrp="1"/>
+          </p:cNvSpPr>
+          <p:nvPr>
+            <p:ph type="body" idx="102"/>
+          </p:nvPr>
+        </p:nvSpPr>
+        <p:spPr/>
+        <p:txBody>
+          <a:bodyPr/>
+          <a:lstStyle/>
+          <a:p>
+            <a:pPr/>
+            <a:r>
+              <a:t>연습 12.1 ★ — 90분위와 최댓값 중 서비스 품질 지표 선택</a:t>
+            </a:r>
+          </a:p>
+          <a:p>
+            <a:pPr lvl="1"/>
+            <a:r>
+              <a:t>산출물: 꺾은선 그래프 1장, 선택과 근거 3~4줄</a:t>
+            </a:r>
+          </a:p>
+          <a:p>
+            <a:pPr/>
+            <a:r>
+              <a:t>연습 12.2 ★★ — 포기 벌점을 15, 30, 60분으로 변경했을 때의 순위 변화</a:t>
+            </a:r>
+          </a:p>
+          <a:p>
+            <a:pPr lvl="1"/>
+            <a:r>
+              <a:t>산출물: 벌점별 순위표, 역전 지점, 보고서 문장 2~3줄</a:t>
+            </a:r>
+          </a:p>
+          <a:p>
+            <a:pPr/>
+            <a:r>
+              <a:t>연습 12.3 ★★★ — 공간 형평성 지표 정의와 구현</a:t>
+            </a:r>
+          </a:p>
+          <a:p>
+            <a:pPr/>
+            <a:r>
+              <a:t>다음 주: 8주차 휴강, HW3 무당이 GTFS 작성과 승하차 조사 (팀)</a:t>
+            </a:r>
+          </a:p>
+        </p:txBody>
+      </p:sp>
+      <p:sp>
+        <p:nvSpPr>
+          <p:cNvPr id="25" name="Slide Number Placeholder 0"/>
+          <p:cNvSpPr>
+            <a:spLocks noGrp="1"/>
+          </p:cNvSpPr>
+          <p:nvPr>
+            <p:ph type="sldNum" sz="quarter" idx="4294967295"/>
+          </p:nvPr>
+        </p:nvSpPr>
+        <p:spPr>
+          <a:xfrm>
+            <a:off x="10591495" y="6355080"/>
+            <a:ext cx="914400" cy="274320"/>
+          </a:xfrm>
+          <a:prstGeom prst="rect">
+            <a:avLst/>
+          </a:prstGeom>
+          <a:extLst>
+            <a:ext uri="{C572A759-6A51-4108-AA02-DFA0A04FC94B}">
+              <ma14:wrappingTextBoxFlag xmlns:ma14="http://schemas.microsoft.com/office/mac/drawingml/2011/main" val="0"/>
+            </a:ext>
+          </a:extLst>
+        </p:spPr>
+        <p:txBody>
+          <a:bodyPr/>
+          <a:lstStyle>
+            <a:lvl1pPr>
+              <a:defRPr sz="1000">
+                <a:solidFill>
+                  <a:srgbClr val="AFAFAF"/>
+                </a:solidFill>
+                <a:latin typeface="Pretendard Medium"/>
+                <a:ea typeface="Pretendard Medium"/>
+                <a:cs typeface="Pretendard Medium"/>
+              </a:defRPr>
+            </a:lvl1pPr>
+          </a:lstStyle>
+          <a:p>
+            <a:pPr algn="r"/>
+            <a:fld id="{F7021451-1387-4CA6-816F-3879F97B5CBC}" type="slidenum">
+              <a:rPr b="0" lang="en-US"/>
+              <a:t>1004</a:t>
+            </a:fld>
+            <a:endParaRPr lang="en-US"/>
+          </a:p>
+        </p:txBody>
+      </p:sp>
+    </p:spTree>
+  </p:cSld>
+  <p:clrMapOvr>
+    <a:masterClrMapping/>
+  </p:clrMapOvr>
+</p:sld>
+</file>
+
+<file path=ppt/slides/slide23.xml><?xml version="1.0" encoding="utf-8"?>
+<p:sld xmlns:a="http://schemas.openxmlformats.org/drawingml/2006/main" xmlns:p="http://schemas.openxmlformats.org/presentationml/2006/main" xmlns:r="http://schemas.openxmlformats.org/officeDocument/2006/relationships">
+  <p:cSld>
+    <p:spTree>
+      <p:nvGrpSpPr>
+        <p:cNvPr id="1" name=""/>
+        <p:cNvGrpSpPr/>
+        <p:nvPr/>
+      </p:nvGrpSpPr>
+      <p:grpSpPr/>
+      <p:sp>
+        <p:nvSpPr>
+          <p:cNvPr id="2" name="Title 1"/>
+          <p:cNvSpPr>
+            <a:spLocks noGrp="1"/>
+          </p:cNvSpPr>
+          <p:nvPr>
+            <p:ph type="title" idx="100"/>
+          </p:nvPr>
+        </p:nvSpPr>
+        <p:spPr/>
+        <p:txBody>
+          <a:bodyPr/>
+          <a:lstStyle/>
+          <a:p>
+            <a:r>
               <a:t>다음 주에 봅니다</a:t>
             </a:r>
           </a:p>
@@ -7839,6 +8534,24 @@
               <a:t>학습 목표</a:t>
             </a:r>
           </a:p>
+          <a:p>
+            <a:pPr>
+              <a:spcAft>
+                <a:spcPts val="1000"/>
+              </a:spcAft>
+            </a:pPr>
+            <a:r>
+              <a:rPr>
+                <a:solidFill>
+                  <a:srgbClr val="AFAFAF"/>
+                </a:solidFill>
+              </a:rPr>
+              <a:t>1.3  </a:t>
+            </a:r>
+            <a:r>
+              <a:t>교재와 실습을 여는 곳</a:t>
+            </a:r>
+          </a:p>
         </p:txBody>
       </p:sp>
     </p:spTree>
@@ -8157,12 +8870,12 @@
       <p:grpSpPr/>
       <p:sp>
         <p:nvSpPr>
-          <p:cNvPr id="2" name="Text Placeholder 1"/>
-          <p:cNvSpPr>
-            <a:spLocks noGrp="1"/>
-          </p:cNvSpPr>
-          <p:nvPr>
-            <p:ph type="body" idx="100"/>
+          <p:cNvPr id="2" name="Title 1"/>
+          <p:cNvSpPr>
+            <a:spLocks noGrp="1"/>
+          </p:cNvSpPr>
+          <p:nvPr>
+            <p:ph type="title" idx="100"/>
           </p:nvPr>
         </p:nvSpPr>
         <p:spPr/>
@@ -8171,19 +8884,19 @@
           <a:lstStyle/>
           <a:p>
             <a:r>
-              <a:t>02</a:t>
-            </a:r>
-          </a:p>
-        </p:txBody>
-      </p:sp>
-      <p:sp>
-        <p:nvSpPr>
-          <p:cNvPr id="3" name="Title 2"/>
-          <p:cNvSpPr>
-            <a:spLocks noGrp="1"/>
-          </p:cNvSpPr>
-          <p:nvPr>
-            <p:ph type="title" idx="101"/>
+              <a:t>1.3 교재와 실습을 여는 곳</a:t>
+            </a:r>
+          </a:p>
+        </p:txBody>
+      </p:sp>
+      <p:sp>
+        <p:nvSpPr>
+          <p:cNvPr id="3" name="Text Placeholder 2"/>
+          <p:cNvSpPr>
+            <a:spLocks noGrp="1"/>
+          </p:cNvSpPr>
+          <p:nvPr>
+            <p:ph type="body" idx="101"/>
           </p:nvPr>
         </p:nvSpPr>
         <p:spPr/>
@@ -8192,7 +8905,7 @@
           <a:lstStyle/>
           <a:p>
             <a:r>
-              <a:t>교재 12.1 지표 세 무리</a:t>
+              <a:t>1. 도입과 학습 목표</a:t>
             </a:r>
           </a:p>
         </p:txBody>
@@ -8212,22 +8925,409 @@
           <a:bodyPr/>
           <a:lstStyle/>
           <a:p>
-            <a:pPr>
-              <a:spcAft>
-                <a:spcPts val="1000"/>
-              </a:spcAft>
-            </a:pPr>
-            <a:r>
-              <a:rPr>
+            <a:pPr/>
+            <a:r>
+              <a:t>저장소: github.com/jihoyeo/mobility-simulation-book — blob/main 아래 경로</a:t>
+            </a:r>
+          </a:p>
+          <a:p>
+            <a:pPr/>
+            <a:r>
+              <a:t>노트북 실행: jupyter lab labs/ch12_metrics.ipynb</a:t>
+            </a:r>
+          </a:p>
+          <a:p>
+            <a:pPr/>
+            <a:r>
+              <a:t>진행 순서: 슬라이드 개요 → 교재 본문 → 실습 노트북</a:t>
+            </a:r>
+          </a:p>
+        </p:txBody>
+      </p:sp>
+      <p:sp>
+        <p:nvSpPr>
+          <p:cNvPr id="5" name="Text Placeholder 4"/>
+          <p:cNvSpPr>
+            <a:spLocks noGrp="1"/>
+          </p:cNvSpPr>
+          <p:nvPr>
+            <p:ph type="body" idx="103"/>
+          </p:nvPr>
+        </p:nvSpPr>
+        <p:spPr/>
+        <p:txBody>
+          <a:bodyPr/>
+          <a:lstStyle/>
+          <a:p>
+            <a:r>
+              <a:t>표 1. 오늘 여는 파일과 경로</a:t>
+            </a:r>
+          </a:p>
+        </p:txBody>
+      </p:sp>
+      <p:graphicFrame>
+        <p:nvGraphicFramePr>
+          <p:cNvPr id="6" name="Table Placeholder 5"/>
+          <p:cNvGraphicFramePr>
+            <a:graphicFrameLocks noGrp="1"/>
+          </p:cNvGraphicFramePr>
+          <p:nvPr>
+            <p:ph type="tbl" idx="104"/>
+          </p:nvPr>
+        </p:nvGraphicFramePr>
+        <p:xfrm>
+          <a:off x="4937760" y="1828800"/>
+          <a:ext cx="6565392" cy="2311400"/>
+        </p:xfrm>
+        <a:graphic>
+          <a:graphicData uri="http://schemas.openxmlformats.org/drawingml/2006/table">
+            <a:tbl>
+              <a:tblPr firstRow="0" bandRow="0" firstCol="0" lastRow="0" lastCol="0" bandCol="0"/>
+              <a:tblGrid>
+                <a:gridCol w="3282696"/>
+                <a:gridCol w="3282696"/>
+              </a:tblGrid>
+              <a:tr h="406400">
+                <a:tc>
+                  <a:txBody>
+                    <a:bodyPr/>
+                    <a:lstStyle/>
+                    <a:p>
+                      <a:r>
+                        <a:rPr sz="1300" b="0">
+                          <a:solidFill>
+                            <a:srgbClr val="FFFFFF"/>
+                          </a:solidFill>
+                          <a:latin typeface="Pretendard Medium"/>
+                        </a:rPr>
+                        <a:t>자료</a:t>
+                      </a:r>
+                    </a:p>
+                  </a:txBody>
+                  <a:tcPr marL="101600" marR="101600" marT="76200" marB="76200" anchor="ctr">
+                    <a:solidFill>
+                      <a:srgbClr val="000000"/>
+                    </a:solidFill>
+                    <a:lnL w="0">
+                      <a:noFill/>
+                    </a:lnL>
+                    <a:lnR w="0">
+                      <a:noFill/>
+                    </a:lnR>
+                    <a:lnT w="0">
+                      <a:noFill/>
+                    </a:lnT>
+                    <a:lnB w="0">
+                      <a:noFill/>
+                    </a:lnB>
+                  </a:tcPr>
+                </a:tc>
+                <a:tc>
+                  <a:txBody>
+                    <a:bodyPr/>
+                    <a:lstStyle/>
+                    <a:p>
+                      <a:r>
+                        <a:rPr sz="1300" b="0">
+                          <a:solidFill>
+                            <a:srgbClr val="FFFFFF"/>
+                          </a:solidFill>
+                          <a:latin typeface="Pretendard Medium"/>
+                        </a:rPr>
+                        <a:t>경로</a:t>
+                      </a:r>
+                    </a:p>
+                  </a:txBody>
+                  <a:tcPr marL="101600" marR="101600" marT="76200" marB="76200" anchor="ctr">
+                    <a:solidFill>
+                      <a:srgbClr val="000000"/>
+                    </a:solidFill>
+                    <a:lnL w="0">
+                      <a:noFill/>
+                    </a:lnL>
+                    <a:lnR w="0">
+                      <a:noFill/>
+                    </a:lnR>
+                    <a:lnT w="0">
+                      <a:noFill/>
+                    </a:lnT>
+                    <a:lnB w="0">
+                      <a:noFill/>
+                    </a:lnB>
+                  </a:tcPr>
+                </a:tc>
+              </a:tr>
+              <a:tr h="635000">
+                <a:tc>
+                  <a:txBody>
+                    <a:bodyPr/>
+                    <a:lstStyle/>
+                    <a:p>
+                      <a:r>
+                        <a:rPr sz="1300" b="1">
+                          <a:solidFill>
+                            <a:srgbClr val="000000"/>
+                          </a:solidFill>
+                          <a:latin typeface="Pretendard"/>
+                        </a:rPr>
+                        <a:t>교재 원고</a:t>
+                      </a:r>
+                    </a:p>
+                  </a:txBody>
+                  <a:tcPr marL="101600" marR="101600" marT="101600" marB="101600" anchor="ctr">
+                    <a:solidFill>
+                      <a:srgbClr val="FFFFFF"/>
+                    </a:solidFill>
+                    <a:lnL w="0">
+                      <a:noFill/>
+                    </a:lnL>
+                    <a:lnR w="0">
+                      <a:noFill/>
+                    </a:lnR>
+                    <a:lnT w="0">
+                      <a:noFill/>
+                    </a:lnT>
+                    <a:lnB w="9525">
+                      <a:solidFill>
+                        <a:srgbClr val="E2E2E2"/>
+                      </a:solidFill>
+                    </a:lnB>
+                  </a:tcPr>
+                </a:tc>
+                <a:tc>
+                  <a:txBody>
+                    <a:bodyPr/>
+                    <a:lstStyle/>
+                    <a:p>
+                      <a:r>
+                        <a:rPr sz="1300" b="0">
+                          <a:solidFill>
+                            <a:srgbClr val="5E5E5E"/>
+                          </a:solidFill>
+                          <a:latin typeface="Pretendard Medium"/>
+                        </a:rPr>
+                        <a:t>ko/ch12_metrics.md</a:t>
+                      </a:r>
+                    </a:p>
+                  </a:txBody>
+                  <a:tcPr marL="101600" marR="101600" marT="101600" marB="101600" anchor="ctr">
+                    <a:solidFill>
+                      <a:srgbClr val="FFFFFF"/>
+                    </a:solidFill>
+                    <a:lnL w="0">
+                      <a:noFill/>
+                    </a:lnL>
+                    <a:lnR w="0">
+                      <a:noFill/>
+                    </a:lnR>
+                    <a:lnT w="0">
+                      <a:noFill/>
+                    </a:lnT>
+                    <a:lnB w="9525">
+                      <a:solidFill>
+                        <a:srgbClr val="E2E2E2"/>
+                      </a:solidFill>
+                    </a:lnB>
+                  </a:tcPr>
+                </a:tc>
+              </a:tr>
+              <a:tr h="635000">
+                <a:tc>
+                  <a:txBody>
+                    <a:bodyPr/>
+                    <a:lstStyle/>
+                    <a:p>
+                      <a:r>
+                        <a:rPr sz="1300" b="1">
+                          <a:solidFill>
+                            <a:srgbClr val="000000"/>
+                          </a:solidFill>
+                          <a:latin typeface="Pretendard"/>
+                        </a:rPr>
+                        <a:t>실습 노트북</a:t>
+                      </a:r>
+                    </a:p>
+                  </a:txBody>
+                  <a:tcPr marL="101600" marR="101600" marT="101600" marB="101600" anchor="ctr">
+                    <a:solidFill>
+                      <a:srgbClr val="FFFFFF"/>
+                    </a:solidFill>
+                    <a:lnL w="0">
+                      <a:noFill/>
+                    </a:lnL>
+                    <a:lnR w="0">
+                      <a:noFill/>
+                    </a:lnR>
+                    <a:lnT w="0">
+                      <a:noFill/>
+                    </a:lnT>
+                    <a:lnB w="9525">
+                      <a:solidFill>
+                        <a:srgbClr val="E2E2E2"/>
+                      </a:solidFill>
+                    </a:lnB>
+                  </a:tcPr>
+                </a:tc>
+                <a:tc>
+                  <a:txBody>
+                    <a:bodyPr/>
+                    <a:lstStyle/>
+                    <a:p>
+                      <a:r>
+                        <a:rPr sz="1300" b="0">
+                          <a:solidFill>
+                            <a:srgbClr val="5E5E5E"/>
+                          </a:solidFill>
+                          <a:latin typeface="Pretendard Medium"/>
+                        </a:rPr>
+                        <a:t>labs/ch12_metrics.ipynb</a:t>
+                      </a:r>
+                    </a:p>
+                  </a:txBody>
+                  <a:tcPr marL="101600" marR="101600" marT="101600" marB="101600" anchor="ctr">
+                    <a:solidFill>
+                      <a:srgbClr val="FFFFFF"/>
+                    </a:solidFill>
+                    <a:lnL w="0">
+                      <a:noFill/>
+                    </a:lnL>
+                    <a:lnR w="0">
+                      <a:noFill/>
+                    </a:lnR>
+                    <a:lnT w="0">
+                      <a:noFill/>
+                    </a:lnT>
+                    <a:lnB w="9525">
+                      <a:solidFill>
+                        <a:srgbClr val="E2E2E2"/>
+                      </a:solidFill>
+                    </a:lnB>
+                  </a:tcPr>
+                </a:tc>
+              </a:tr>
+              <a:tr h="635000">
+                <a:tc>
+                  <a:txBody>
+                    <a:bodyPr/>
+                    <a:lstStyle/>
+                    <a:p>
+                      <a:r>
+                        <a:rPr sz="1300" b="1">
+                          <a:solidFill>
+                            <a:srgbClr val="000000"/>
+                          </a:solidFill>
+                          <a:latin typeface="Pretendard"/>
+                        </a:rPr>
+                        <a:t>웹 뷰어</a:t>
+                      </a:r>
+                    </a:p>
+                  </a:txBody>
+                  <a:tcPr marL="101600" marR="101600" marT="101600" marB="101600" anchor="ctr">
+                    <a:solidFill>
+                      <a:srgbClr val="FFFFFF"/>
+                    </a:solidFill>
+                    <a:lnL w="0">
+                      <a:noFill/>
+                    </a:lnL>
+                    <a:lnR w="0">
+                      <a:noFill/>
+                    </a:lnR>
+                    <a:lnT w="0">
+                      <a:noFill/>
+                    </a:lnT>
+                    <a:lnB w="9525">
+                      <a:solidFill>
+                        <a:srgbClr val="E2E2E2"/>
+                      </a:solidFill>
+                    </a:lnB>
+                  </a:tcPr>
+                </a:tc>
+                <a:tc>
+                  <a:txBody>
+                    <a:bodyPr/>
+                    <a:lstStyle/>
+                    <a:p>
+                      <a:r>
+                        <a:rPr sz="1300" b="0">
+                          <a:solidFill>
+                            <a:srgbClr val="5E5E5E"/>
+                          </a:solidFill>
+                          <a:latin typeface="Pretendard Medium"/>
+                        </a:rPr>
+                        <a:t>labs/ch12_viewer/</a:t>
+                      </a:r>
+                    </a:p>
+                  </a:txBody>
+                  <a:tcPr marL="101600" marR="101600" marT="101600" marB="101600" anchor="ctr">
+                    <a:solidFill>
+                      <a:srgbClr val="FFFFFF"/>
+                    </a:solidFill>
+                    <a:lnL w="0">
+                      <a:noFill/>
+                    </a:lnL>
+                    <a:lnR w="0">
+                      <a:noFill/>
+                    </a:lnR>
+                    <a:lnT w="0">
+                      <a:noFill/>
+                    </a:lnT>
+                    <a:lnB w="9525">
+                      <a:solidFill>
+                        <a:srgbClr val="E2E2E2"/>
+                      </a:solidFill>
+                    </a:lnB>
+                  </a:tcPr>
+                </a:tc>
+              </a:tr>
+            </a:tbl>
+          </a:graphicData>
+        </a:graphic>
+      </p:graphicFrame>
+      <p:sp>
+        <p:nvSpPr>
+          <p:cNvPr id="25" name="Slide Number Placeholder 0"/>
+          <p:cNvSpPr>
+            <a:spLocks noGrp="1"/>
+          </p:cNvSpPr>
+          <p:nvPr>
+            <p:ph type="sldNum" sz="quarter" idx="4294967295"/>
+          </p:nvPr>
+        </p:nvSpPr>
+        <p:spPr>
+          <a:xfrm>
+            <a:off x="10591495" y="6355080"/>
+            <a:ext cx="914400" cy="274320"/>
+          </a:xfrm>
+          <a:prstGeom prst="rect">
+            <a:avLst/>
+          </a:prstGeom>
+          <a:extLst>
+            <a:ext uri="{C572A759-6A51-4108-AA02-DFA0A04FC94B}">
+              <ma14:wrappingTextBoxFlag xmlns:ma14="http://schemas.microsoft.com/office/mac/drawingml/2011/main" val="0"/>
+            </a:ext>
+          </a:extLst>
+        </p:spPr>
+        <p:txBody>
+          <a:bodyPr/>
+          <a:lstStyle>
+            <a:lvl1pPr>
+              <a:defRPr sz="1000">
                 <a:solidFill>
                   <a:srgbClr val="AFAFAF"/>
                 </a:solidFill>
-              </a:rPr>
-              <a:t>2.1  </a:t>
-            </a:r>
-            <a:r>
-              <a:t>관점별 지표</a:t>
-            </a:r>
+                <a:latin typeface="Pretendard Medium"/>
+                <a:ea typeface="Pretendard Medium"/>
+                <a:cs typeface="Pretendard Medium"/>
+              </a:defRPr>
+            </a:lvl1pPr>
+          </a:lstStyle>
+          <a:p>
+            <a:pPr algn="r"/>
+            <a:fld id="{F7021451-1387-4CA6-816F-3879F97B5CBC}" type="slidenum">
+              <a:rPr b="0" lang="en-US"/>
+              <a:t>1008</a:t>
+            </a:fld>
+            <a:endParaRPr lang="en-US"/>
           </a:p>
         </p:txBody>
       </p:sp>
@@ -8251,6 +9351,100 @@
       <p:grpSpPr/>
       <p:sp>
         <p:nvSpPr>
+          <p:cNvPr id="2" name="Text Placeholder 1"/>
+          <p:cNvSpPr>
+            <a:spLocks noGrp="1"/>
+          </p:cNvSpPr>
+          <p:nvPr>
+            <p:ph type="body" idx="100"/>
+          </p:nvPr>
+        </p:nvSpPr>
+        <p:spPr/>
+        <p:txBody>
+          <a:bodyPr/>
+          <a:lstStyle/>
+          <a:p>
+            <a:r>
+              <a:t>02</a:t>
+            </a:r>
+          </a:p>
+        </p:txBody>
+      </p:sp>
+      <p:sp>
+        <p:nvSpPr>
+          <p:cNvPr id="3" name="Title 2"/>
+          <p:cNvSpPr>
+            <a:spLocks noGrp="1"/>
+          </p:cNvSpPr>
+          <p:nvPr>
+            <p:ph type="title" idx="101"/>
+          </p:nvPr>
+        </p:nvSpPr>
+        <p:spPr/>
+        <p:txBody>
+          <a:bodyPr/>
+          <a:lstStyle/>
+          <a:p>
+            <a:r>
+              <a:t>교재 12.1 지표 세 무리</a:t>
+            </a:r>
+          </a:p>
+        </p:txBody>
+      </p:sp>
+      <p:sp>
+        <p:nvSpPr>
+          <p:cNvPr id="4" name="Text Placeholder 3"/>
+          <p:cNvSpPr>
+            <a:spLocks noGrp="1"/>
+          </p:cNvSpPr>
+          <p:nvPr>
+            <p:ph type="body" idx="102"/>
+          </p:nvPr>
+        </p:nvSpPr>
+        <p:spPr/>
+        <p:txBody>
+          <a:bodyPr/>
+          <a:lstStyle/>
+          <a:p>
+            <a:pPr>
+              <a:spcAft>
+                <a:spcPts val="1000"/>
+              </a:spcAft>
+            </a:pPr>
+            <a:r>
+              <a:rPr>
+                <a:solidFill>
+                  <a:srgbClr val="AFAFAF"/>
+                </a:solidFill>
+              </a:rPr>
+              <a:t>2.1  </a:t>
+            </a:r>
+            <a:r>
+              <a:t>관점별 지표</a:t>
+            </a:r>
+          </a:p>
+        </p:txBody>
+      </p:sp>
+    </p:spTree>
+  </p:cSld>
+  <p:clrMapOvr>
+    <a:masterClrMapping/>
+  </p:clrMapOvr>
+</p:sld>
+</file>
+
+<file path=ppt/slides/slide8.xml><?xml version="1.0" encoding="utf-8"?>
+<p:sld xmlns:a="http://schemas.openxmlformats.org/drawingml/2006/main" xmlns:p="http://schemas.openxmlformats.org/presentationml/2006/main" xmlns:r="http://schemas.openxmlformats.org/officeDocument/2006/relationships">
+  <p:cSld>
+    <p:spTree>
+      <p:nvGrpSpPr>
+        <p:cNvPr id="1" name=""/>
+        <p:cNvGrpSpPr/>
+        <p:nvPr/>
+      </p:nvGrpSpPr>
+      <p:grpSpPr/>
+      <p:sp>
+        <p:nvSpPr>
           <p:cNvPr id="2" name="Title 1"/>
           <p:cNvSpPr>
             <a:spLocks noGrp="1"/>
@@ -8341,7 +9535,7 @@
           <a:lstStyle/>
           <a:p>
             <a:r>
-              <a:t>표 1. 세 관점이 확인하는 것과 대응 지표</a:t>
+              <a:t>표 2. 세 관점이 확인하는 것과 대응 지표</a:t>
             </a:r>
           </a:p>
         </p:txBody>
@@ -8863,136 +10057,6 @@
 </p:sld>
 </file>
 
-<file path=ppt/slides/slide8.xml><?xml version="1.0" encoding="utf-8"?>
-<p:sld xmlns:a="http://schemas.openxmlformats.org/drawingml/2006/main" xmlns:p="http://schemas.openxmlformats.org/presentationml/2006/main" xmlns:r="http://schemas.openxmlformats.org/officeDocument/2006/relationships">
-  <p:cSld>
-    <p:spTree>
-      <p:nvGrpSpPr>
-        <p:cNvPr id="1" name=""/>
-        <p:cNvGrpSpPr/>
-        <p:nvPr/>
-      </p:nvGrpSpPr>
-      <p:grpSpPr/>
-      <p:sp>
-        <p:nvSpPr>
-          <p:cNvPr id="2" name="Text Placeholder 1"/>
-          <p:cNvSpPr>
-            <a:spLocks noGrp="1"/>
-          </p:cNvSpPr>
-          <p:nvPr>
-            <p:ph type="body" idx="100"/>
-          </p:nvPr>
-        </p:nvSpPr>
-        <p:spPr/>
-        <p:txBody>
-          <a:bodyPr/>
-          <a:lstStyle/>
-          <a:p>
-            <a:r>
-              <a:t>03</a:t>
-            </a:r>
-          </a:p>
-        </p:txBody>
-      </p:sp>
-      <p:sp>
-        <p:nvSpPr>
-          <p:cNvPr id="3" name="Title 2"/>
-          <p:cNvSpPr>
-            <a:spLocks noGrp="1"/>
-          </p:cNvSpPr>
-          <p:nvPr>
-            <p:ph type="title" idx="101"/>
-          </p:nvPr>
-        </p:nvSpPr>
-        <p:spPr/>
-        <p:txBody>
-          <a:bodyPr/>
-          <a:lstStyle/>
-          <a:p>
-            <a:r>
-              <a:t>교재 12.2–12.3 생존 편향과 분포</a:t>
-            </a:r>
-          </a:p>
-        </p:txBody>
-      </p:sp>
-      <p:sp>
-        <p:nvSpPr>
-          <p:cNvPr id="4" name="Text Placeholder 3"/>
-          <p:cNvSpPr>
-            <a:spLocks noGrp="1"/>
-          </p:cNvSpPr>
-          <p:nvPr>
-            <p:ph type="body" idx="102"/>
-          </p:nvPr>
-        </p:nvSpPr>
-        <p:spPr/>
-        <p:txBody>
-          <a:bodyPr/>
-          <a:lstStyle/>
-          <a:p>
-            <a:pPr>
-              <a:spcAft>
-                <a:spcPts val="1000"/>
-              </a:spcAft>
-            </a:pPr>
-            <a:r>
-              <a:rPr>
-                <a:solidFill>
-                  <a:srgbClr val="AFAFAF"/>
-                </a:solidFill>
-              </a:rPr>
-              <a:t>3.1  </a:t>
-            </a:r>
-            <a:r>
-              <a:t>대기시간이 줄지 않는 이유</a:t>
-            </a:r>
-          </a:p>
-          <a:p>
-            <a:pPr>
-              <a:spcAft>
-                <a:spcPts val="1000"/>
-              </a:spcAft>
-            </a:pPr>
-            <a:r>
-              <a:rPr>
-                <a:solidFill>
-                  <a:srgbClr val="AFAFAF"/>
-                </a:solidFill>
-              </a:rPr>
-              <a:t>3.2  </a:t>
-            </a:r>
-            <a:r>
-              <a:t>포기 승객을 세는 방법</a:t>
-            </a:r>
-          </a:p>
-          <a:p>
-            <a:pPr>
-              <a:spcAft>
-                <a:spcPts val="1000"/>
-              </a:spcAft>
-            </a:pPr>
-            <a:r>
-              <a:rPr>
-                <a:solidFill>
-                  <a:srgbClr val="AFAFAF"/>
-                </a:solidFill>
-              </a:rPr>
-              <a:t>3.3  </a:t>
-            </a:r>
-            <a:r>
-              <a:t>분포로 확인하기</a:t>
-            </a:r>
-          </a:p>
-        </p:txBody>
-      </p:sp>
-    </p:spTree>
-  </p:cSld>
-  <p:clrMapOvr>
-    <a:masterClrMapping/>
-  </p:clrMapOvr>
-</p:sld>
-</file>
-
 <file path=ppt/slides/slide9.xml><?xml version="1.0" encoding="utf-8"?>
 <p:sld xmlns:a="http://schemas.openxmlformats.org/drawingml/2006/main" xmlns:p="http://schemas.openxmlformats.org/presentationml/2006/main" xmlns:r="http://schemas.openxmlformats.org/officeDocument/2006/relationships">
   <p:cSld>
@@ -9005,12 +10069,12 @@
       <p:grpSpPr/>
       <p:sp>
         <p:nvSpPr>
-          <p:cNvPr id="2" name="Title 1"/>
-          <p:cNvSpPr>
-            <a:spLocks noGrp="1"/>
-          </p:cNvSpPr>
-          <p:nvPr>
-            <p:ph type="title" idx="100"/>
+          <p:cNvPr id="2" name="Text Placeholder 1"/>
+          <p:cNvSpPr>
+            <a:spLocks noGrp="1"/>
+          </p:cNvSpPr>
+          <p:nvPr>
+            <p:ph type="body" idx="100"/>
           </p:nvPr>
         </p:nvSpPr>
         <p:spPr/>
@@ -9019,19 +10083,19 @@
           <a:lstStyle/>
           <a:p>
             <a:r>
-              <a:t>3.1 대기시간이 줄지 않는 이유</a:t>
-            </a:r>
-          </a:p>
-        </p:txBody>
-      </p:sp>
-      <p:sp>
-        <p:nvSpPr>
-          <p:cNvPr id="3" name="Text Placeholder 2"/>
-          <p:cNvSpPr>
-            <a:spLocks noGrp="1"/>
-          </p:cNvSpPr>
-          <p:nvPr>
-            <p:ph type="body" idx="101"/>
+              <a:t>03</a:t>
+            </a:r>
+          </a:p>
+        </p:txBody>
+      </p:sp>
+      <p:sp>
+        <p:nvSpPr>
+          <p:cNvPr id="3" name="Title 2"/>
+          <p:cNvSpPr>
+            <a:spLocks noGrp="1"/>
+          </p:cNvSpPr>
+          <p:nvPr>
+            <p:ph type="title" idx="101"/>
           </p:nvPr>
         </p:nvSpPr>
         <p:spPr/>
@@ -9040,7 +10104,7 @@
           <a:lstStyle/>
           <a:p>
             <a:r>
-              <a:t>3. 교재 12.2–12.3 생존 편향과 분포</a:t>
+              <a:t>교재 12.2–12.3 생존 편향과 분포</a:t>
             </a:r>
           </a:p>
         </p:txBody>
@@ -9060,552 +10124,58 @@
           <a:bodyPr/>
           <a:lstStyle/>
           <a:p>
-            <a:pPr/>
-            <a:r>
-              <a:t>대기시간은 배차에 성공한 승객만 계산 대상</a:t>
-            </a:r>
-          </a:p>
-          <a:p>
-            <a:pPr/>
-            <a:r>
-              <a:t>차량이 적으면 가까운 승객만 배차되고 먼 승객은 포기 처리</a:t>
-            </a:r>
-          </a:p>
-          <a:p>
-            <a:pPr/>
-            <a:r>
-              <a:t>남은 승객의 평균 대기가 짧게 산출 — 생존 편향</a:t>
-            </a:r>
-          </a:p>
-        </p:txBody>
-      </p:sp>
-      <p:sp>
-        <p:nvSpPr>
-          <p:cNvPr id="5" name="Text Placeholder 4"/>
-          <p:cNvSpPr>
-            <a:spLocks noGrp="1"/>
-          </p:cNvSpPr>
-          <p:nvPr>
-            <p:ph type="body" idx="103"/>
-          </p:nvPr>
-        </p:nvSpPr>
-        <p:spPr/>
-        <p:txBody>
-          <a:bodyPr/>
-          <a:lstStyle/>
-          <a:p>
-            <a:r>
-              <a:t>표 2. 차량 대수별 평균 대기시간과 서비스율</a:t>
-            </a:r>
-          </a:p>
-        </p:txBody>
-      </p:sp>
-      <p:graphicFrame>
-        <p:nvGraphicFramePr>
-          <p:cNvPr id="6" name="Table Placeholder 5"/>
-          <p:cNvGraphicFramePr>
-            <a:graphicFrameLocks noGrp="1"/>
-          </p:cNvGraphicFramePr>
-          <p:nvPr>
-            <p:ph type="tbl" idx="104"/>
-          </p:nvPr>
-        </p:nvGraphicFramePr>
-        <p:xfrm>
-          <a:off x="4937760" y="1828800"/>
-          <a:ext cx="6565392" cy="2311400"/>
-        </p:xfrm>
-        <a:graphic>
-          <a:graphicData uri="http://schemas.openxmlformats.org/drawingml/2006/table">
-            <a:tbl>
-              <a:tblPr firstRow="0" bandRow="0" firstCol="0" lastRow="0" lastCol="0" bandCol="0"/>
-              <a:tblGrid>
-                <a:gridCol w="2188464"/>
-                <a:gridCol w="2188464"/>
-                <a:gridCol w="2188464"/>
-              </a:tblGrid>
-              <a:tr h="406400">
-                <a:tc>
-                  <a:txBody>
-                    <a:bodyPr/>
-                    <a:lstStyle/>
-                    <a:p>
-                      <a:r>
-                        <a:rPr sz="1300" b="0">
-                          <a:solidFill>
-                            <a:srgbClr val="FFFFFF"/>
-                          </a:solidFill>
-                          <a:latin typeface="Pretendard Medium"/>
-                        </a:rPr>
-                        <a:t>차량</a:t>
-                      </a:r>
-                    </a:p>
-                  </a:txBody>
-                  <a:tcPr marL="101600" marR="101600" marT="76200" marB="76200" anchor="ctr">
-                    <a:solidFill>
-                      <a:srgbClr val="000000"/>
-                    </a:solidFill>
-                    <a:lnL w="0">
-                      <a:noFill/>
-                    </a:lnL>
-                    <a:lnR w="0">
-                      <a:noFill/>
-                    </a:lnR>
-                    <a:lnT w="0">
-                      <a:noFill/>
-                    </a:lnT>
-                    <a:lnB w="0">
-                      <a:noFill/>
-                    </a:lnB>
-                  </a:tcPr>
-                </a:tc>
-                <a:tc>
-                  <a:txBody>
-                    <a:bodyPr/>
-                    <a:lstStyle/>
-                    <a:p>
-                      <a:r>
-                        <a:rPr sz="1300" b="0">
-                          <a:solidFill>
-                            <a:srgbClr val="FFFFFF"/>
-                          </a:solidFill>
-                          <a:latin typeface="Pretendard Medium"/>
-                        </a:rPr>
-                        <a:t>평균 대기</a:t>
-                      </a:r>
-                    </a:p>
-                  </a:txBody>
-                  <a:tcPr marL="101600" marR="101600" marT="76200" marB="76200" anchor="ctr">
-                    <a:solidFill>
-                      <a:srgbClr val="000000"/>
-                    </a:solidFill>
-                    <a:lnL w="0">
-                      <a:noFill/>
-                    </a:lnL>
-                    <a:lnR w="0">
-                      <a:noFill/>
-                    </a:lnR>
-                    <a:lnT w="0">
-                      <a:noFill/>
-                    </a:lnT>
-                    <a:lnB w="0">
-                      <a:noFill/>
-                    </a:lnB>
-                  </a:tcPr>
-                </a:tc>
-                <a:tc>
-                  <a:txBody>
-                    <a:bodyPr/>
-                    <a:lstStyle/>
-                    <a:p>
-                      <a:r>
-                        <a:rPr sz="1300" b="0">
-                          <a:solidFill>
-                            <a:srgbClr val="FFFFFF"/>
-                          </a:solidFill>
-                          <a:latin typeface="Pretendard Medium"/>
-                        </a:rPr>
-                        <a:t>서비스율</a:t>
-                      </a:r>
-                    </a:p>
-                  </a:txBody>
-                  <a:tcPr marL="101600" marR="101600" marT="76200" marB="76200" anchor="ctr">
-                    <a:solidFill>
-                      <a:srgbClr val="000000"/>
-                    </a:solidFill>
-                    <a:lnL w="0">
-                      <a:noFill/>
-                    </a:lnL>
-                    <a:lnR w="0">
-                      <a:noFill/>
-                    </a:lnR>
-                    <a:lnT w="0">
-                      <a:noFill/>
-                    </a:lnT>
-                    <a:lnB w="0">
-                      <a:noFill/>
-                    </a:lnB>
-                  </a:tcPr>
-                </a:tc>
-              </a:tr>
-              <a:tr h="635000">
-                <a:tc>
-                  <a:txBody>
-                    <a:bodyPr/>
-                    <a:lstStyle/>
-                    <a:p>
-                      <a:r>
-                        <a:rPr sz="1300" b="1">
-                          <a:solidFill>
-                            <a:srgbClr val="000000"/>
-                          </a:solidFill>
-                          <a:latin typeface="Pretendard"/>
-                        </a:rPr>
-                        <a:t>20대</a:t>
-                      </a:r>
-                    </a:p>
-                  </a:txBody>
-                  <a:tcPr marL="101600" marR="101600" marT="101600" marB="101600" anchor="ctr">
-                    <a:solidFill>
-                      <a:srgbClr val="FFFFFF"/>
-                    </a:solidFill>
-                    <a:lnL w="0">
-                      <a:noFill/>
-                    </a:lnL>
-                    <a:lnR w="0">
-                      <a:noFill/>
-                    </a:lnR>
-                    <a:lnT w="0">
-                      <a:noFill/>
-                    </a:lnT>
-                    <a:lnB w="9525">
-                      <a:solidFill>
-                        <a:srgbClr val="E2E2E2"/>
-                      </a:solidFill>
-                    </a:lnB>
-                  </a:tcPr>
-                </a:tc>
-                <a:tc>
-                  <a:txBody>
-                    <a:bodyPr/>
-                    <a:lstStyle/>
-                    <a:p>
-                      <a:r>
-                        <a:rPr sz="1300" b="0">
-                          <a:solidFill>
-                            <a:srgbClr val="5E5E5E"/>
-                          </a:solidFill>
-                          <a:latin typeface="Pretendard Medium"/>
-                        </a:rPr>
-                        <a:t>7.32분</a:t>
-                      </a:r>
-                    </a:p>
-                  </a:txBody>
-                  <a:tcPr marL="101600" marR="101600" marT="101600" marB="101600" anchor="ctr">
-                    <a:solidFill>
-                      <a:srgbClr val="FFFFFF"/>
-                    </a:solidFill>
-                    <a:lnL w="0">
-                      <a:noFill/>
-                    </a:lnL>
-                    <a:lnR w="0">
-                      <a:noFill/>
-                    </a:lnR>
-                    <a:lnT w="0">
-                      <a:noFill/>
-                    </a:lnT>
-                    <a:lnB w="9525">
-                      <a:solidFill>
-                        <a:srgbClr val="E2E2E2"/>
-                      </a:solidFill>
-                    </a:lnB>
-                  </a:tcPr>
-                </a:tc>
-                <a:tc>
-                  <a:txBody>
-                    <a:bodyPr/>
-                    <a:lstStyle/>
-                    <a:p>
-                      <a:r>
-                        <a:rPr sz="1300" b="0">
-                          <a:solidFill>
-                            <a:srgbClr val="5E5E5E"/>
-                          </a:solidFill>
-                          <a:latin typeface="Pretendard Medium"/>
-                        </a:rPr>
-                        <a:t>0.39</a:t>
-                      </a:r>
-                    </a:p>
-                  </a:txBody>
-                  <a:tcPr marL="101600" marR="101600" marT="101600" marB="101600" anchor="ctr">
-                    <a:solidFill>
-                      <a:srgbClr val="FFFFFF"/>
-                    </a:solidFill>
-                    <a:lnL w="0">
-                      <a:noFill/>
-                    </a:lnL>
-                    <a:lnR w="0">
-                      <a:noFill/>
-                    </a:lnR>
-                    <a:lnT w="0">
-                      <a:noFill/>
-                    </a:lnT>
-                    <a:lnB w="9525">
-                      <a:solidFill>
-                        <a:srgbClr val="E2E2E2"/>
-                      </a:solidFill>
-                    </a:lnB>
-                  </a:tcPr>
-                </a:tc>
-              </a:tr>
-              <a:tr h="635000">
-                <a:tc>
-                  <a:txBody>
-                    <a:bodyPr/>
-                    <a:lstStyle/>
-                    <a:p>
-                      <a:r>
-                        <a:rPr sz="1300" b="1">
-                          <a:solidFill>
-                            <a:srgbClr val="000000"/>
-                          </a:solidFill>
-                          <a:latin typeface="Pretendard"/>
-                        </a:rPr>
-                        <a:t>60대</a:t>
-                      </a:r>
-                    </a:p>
-                  </a:txBody>
-                  <a:tcPr marL="101600" marR="101600" marT="101600" marB="101600" anchor="ctr">
-                    <a:solidFill>
-                      <a:srgbClr val="FFFFFF"/>
-                    </a:solidFill>
-                    <a:lnL w="0">
-                      <a:noFill/>
-                    </a:lnL>
-                    <a:lnR w="0">
-                      <a:noFill/>
-                    </a:lnR>
-                    <a:lnT w="0">
-                      <a:noFill/>
-                    </a:lnT>
-                    <a:lnB w="9525">
-                      <a:solidFill>
-                        <a:srgbClr val="E2E2E2"/>
-                      </a:solidFill>
-                    </a:lnB>
-                  </a:tcPr>
-                </a:tc>
-                <a:tc>
-                  <a:txBody>
-                    <a:bodyPr/>
-                    <a:lstStyle/>
-                    <a:p>
-                      <a:r>
-                        <a:rPr sz="1300" b="0">
-                          <a:solidFill>
-                            <a:srgbClr val="5E5E5E"/>
-                          </a:solidFill>
-                          <a:latin typeface="Pretendard Medium"/>
-                        </a:rPr>
-                        <a:t>7.21분</a:t>
-                      </a:r>
-                    </a:p>
-                  </a:txBody>
-                  <a:tcPr marL="101600" marR="101600" marT="101600" marB="101600" anchor="ctr">
-                    <a:solidFill>
-                      <a:srgbClr val="FFFFFF"/>
-                    </a:solidFill>
-                    <a:lnL w="0">
-                      <a:noFill/>
-                    </a:lnL>
-                    <a:lnR w="0">
-                      <a:noFill/>
-                    </a:lnR>
-                    <a:lnT w="0">
-                      <a:noFill/>
-                    </a:lnT>
-                    <a:lnB w="9525">
-                      <a:solidFill>
-                        <a:srgbClr val="E2E2E2"/>
-                      </a:solidFill>
-                    </a:lnB>
-                  </a:tcPr>
-                </a:tc>
-                <a:tc>
-                  <a:txBody>
-                    <a:bodyPr/>
-                    <a:lstStyle/>
-                    <a:p>
-                      <a:r>
-                        <a:rPr sz="1300" b="0">
-                          <a:solidFill>
-                            <a:srgbClr val="5E5E5E"/>
-                          </a:solidFill>
-                          <a:latin typeface="Pretendard Medium"/>
-                        </a:rPr>
-                        <a:t>—</a:t>
-                      </a:r>
-                    </a:p>
-                  </a:txBody>
-                  <a:tcPr marL="101600" marR="101600" marT="101600" marB="101600" anchor="ctr">
-                    <a:solidFill>
-                      <a:srgbClr val="FFFFFF"/>
-                    </a:solidFill>
-                    <a:lnL w="0">
-                      <a:noFill/>
-                    </a:lnL>
-                    <a:lnR w="0">
-                      <a:noFill/>
-                    </a:lnR>
-                    <a:lnT w="0">
-                      <a:noFill/>
-                    </a:lnT>
-                    <a:lnB w="9525">
-                      <a:solidFill>
-                        <a:srgbClr val="E2E2E2"/>
-                      </a:solidFill>
-                    </a:lnB>
-                  </a:tcPr>
-                </a:tc>
-              </a:tr>
-              <a:tr h="635000">
-                <a:tc>
-                  <a:txBody>
-                    <a:bodyPr/>
-                    <a:lstStyle/>
-                    <a:p>
-                      <a:r>
-                        <a:rPr sz="1300" b="1">
-                          <a:solidFill>
-                            <a:srgbClr val="000000"/>
-                          </a:solidFill>
-                          <a:latin typeface="Pretendard"/>
-                        </a:rPr>
-                        <a:t>80대</a:t>
-                      </a:r>
-                    </a:p>
-                  </a:txBody>
-                  <a:tcPr marL="101600" marR="101600" marT="101600" marB="101600" anchor="ctr">
-                    <a:solidFill>
-                      <a:srgbClr val="FFFFFF"/>
-                    </a:solidFill>
-                    <a:lnL w="0">
-                      <a:noFill/>
-                    </a:lnL>
-                    <a:lnR w="0">
-                      <a:noFill/>
-                    </a:lnR>
-                    <a:lnT w="0">
-                      <a:noFill/>
-                    </a:lnT>
-                    <a:lnB w="9525">
-                      <a:solidFill>
-                        <a:srgbClr val="E2E2E2"/>
-                      </a:solidFill>
-                    </a:lnB>
-                  </a:tcPr>
-                </a:tc>
-                <a:tc>
-                  <a:txBody>
-                    <a:bodyPr/>
-                    <a:lstStyle/>
-                    <a:p>
-                      <a:r>
-                        <a:rPr sz="1300" b="0">
-                          <a:solidFill>
-                            <a:srgbClr val="5E5E5E"/>
-                          </a:solidFill>
-                          <a:latin typeface="Pretendard Medium"/>
-                        </a:rPr>
-                        <a:t>4.28분</a:t>
-                      </a:r>
-                    </a:p>
-                  </a:txBody>
-                  <a:tcPr marL="101600" marR="101600" marT="101600" marB="101600" anchor="ctr">
-                    <a:solidFill>
-                      <a:srgbClr val="FFFFFF"/>
-                    </a:solidFill>
-                    <a:lnL w="0">
-                      <a:noFill/>
-                    </a:lnL>
-                    <a:lnR w="0">
-                      <a:noFill/>
-                    </a:lnR>
-                    <a:lnT w="0">
-                      <a:noFill/>
-                    </a:lnT>
-                    <a:lnB w="9525">
-                      <a:solidFill>
-                        <a:srgbClr val="E2E2E2"/>
-                      </a:solidFill>
-                    </a:lnB>
-                  </a:tcPr>
-                </a:tc>
-                <a:tc>
-                  <a:txBody>
-                    <a:bodyPr/>
-                    <a:lstStyle/>
-                    <a:p>
-                      <a:r>
-                        <a:rPr sz="1300" b="0">
-                          <a:solidFill>
-                            <a:srgbClr val="5E5E5E"/>
-                          </a:solidFill>
-                          <a:latin typeface="Pretendard Medium"/>
-                        </a:rPr>
-                        <a:t>1.00</a:t>
-                      </a:r>
-                    </a:p>
-                  </a:txBody>
-                  <a:tcPr marL="101600" marR="101600" marT="101600" marB="101600" anchor="ctr">
-                    <a:solidFill>
-                      <a:srgbClr val="FFFFFF"/>
-                    </a:solidFill>
-                    <a:lnL w="0">
-                      <a:noFill/>
-                    </a:lnL>
-                    <a:lnR w="0">
-                      <a:noFill/>
-                    </a:lnR>
-                    <a:lnT w="0">
-                      <a:noFill/>
-                    </a:lnT>
-                    <a:lnB w="9525">
-                      <a:solidFill>
-                        <a:srgbClr val="E2E2E2"/>
-                      </a:solidFill>
-                    </a:lnB>
-                  </a:tcPr>
-                </a:tc>
-              </a:tr>
-            </a:tbl>
-          </a:graphicData>
-        </a:graphic>
-      </p:graphicFrame>
-      <p:sp>
-        <p:nvSpPr>
-          <p:cNvPr id="25" name="Slide Number Placeholder 0"/>
-          <p:cNvSpPr>
-            <a:spLocks noGrp="1"/>
-          </p:cNvSpPr>
-          <p:nvPr>
-            <p:ph type="sldNum" sz="quarter" idx="4294967295"/>
-          </p:nvPr>
-        </p:nvSpPr>
-        <p:spPr>
-          <a:xfrm>
-            <a:off x="10591495" y="6355080"/>
-            <a:ext cx="914400" cy="274320"/>
-          </a:xfrm>
-          <a:prstGeom prst="rect">
-            <a:avLst/>
-          </a:prstGeom>
-          <a:extLst>
-            <a:ext uri="{C572A759-6A51-4108-AA02-DFA0A04FC94B}">
-              <ma14:wrappingTextBoxFlag xmlns:ma14="http://schemas.microsoft.com/office/mac/drawingml/2011/main" val="0"/>
-            </a:ext>
-          </a:extLst>
-        </p:spPr>
-        <p:txBody>
-          <a:bodyPr/>
-          <a:lstStyle>
-            <a:lvl1pPr>
-              <a:defRPr sz="1000">
+            <a:pPr>
+              <a:spcAft>
+                <a:spcPts val="1000"/>
+              </a:spcAft>
+            </a:pPr>
+            <a:r>
+              <a:rPr>
                 <a:solidFill>
                   <a:srgbClr val="AFAFAF"/>
                 </a:solidFill>
-                <a:latin typeface="Pretendard Medium"/>
-                <a:ea typeface="Pretendard Medium"/>
-                <a:cs typeface="Pretendard Medium"/>
-              </a:defRPr>
-            </a:lvl1pPr>
-          </a:lstStyle>
-          <a:p>
-            <a:pPr algn="r"/>
-            <a:fld id="{F7021451-1387-4CA6-816F-3879F97B5CBC}" type="slidenum">
-              <a:rPr b="0" lang="en-US"/>
-              <a:t>1008</a:t>
-            </a:fld>
-            <a:endParaRPr lang="en-US"/>
+              </a:rPr>
+              <a:t>3.1  </a:t>
+            </a:r>
+            <a:r>
+              <a:t>대기시간이 줄지 않는 이유</a:t>
+            </a:r>
+          </a:p>
+          <a:p>
+            <a:pPr>
+              <a:spcAft>
+                <a:spcPts val="1000"/>
+              </a:spcAft>
+            </a:pPr>
+            <a:r>
+              <a:rPr>
+                <a:solidFill>
+                  <a:srgbClr val="AFAFAF"/>
+                </a:solidFill>
+              </a:rPr>
+              <a:t>3.2  </a:t>
+            </a:r>
+            <a:r>
+              <a:t>포기 승객을 세는 방법</a:t>
+            </a:r>
+          </a:p>
+          <a:p>
+            <a:pPr>
+              <a:spcAft>
+                <a:spcPts val="1000"/>
+              </a:spcAft>
+            </a:pPr>
+            <a:r>
+              <a:rPr>
+                <a:solidFill>
+                  <a:srgbClr val="AFAFAF"/>
+                </a:solidFill>
+              </a:rPr>
+              <a:t>3.3  </a:t>
+            </a:r>
+            <a:r>
+              <a:t>분포로 확인하기</a:t>
+            </a:r>
           </a:p>
         </p:txBody>
       </p:sp>
